--- a/examples/showcase/deck.pptx
+++ b/examples/showcase/deck.pptx
@@ -3137,20 +3137,12 @@
         <p:nvPr/>
       </p:nvGrpSpPr>
       <p:grpSpPr/>
-      <p:pic>
-        <p:nvPicPr>
-          <p:cNvPr id="2" name="Picture 1" descr="image.png"/>
-          <p:cNvPicPr>
-            <a:picLocks noChangeAspect="1"/>
-          </p:cNvPicPr>
-          <p:nvPr/>
-        </p:nvPicPr>
-        <p:blipFill>
-          <a:blip r:embed="rId2"/>
-          <a:stretch>
-            <a:fillRect/>
-          </a:stretch>
-        </p:blipFill>
+      <p:sp>
+        <p:nvSpPr>
+          <p:cNvPr id="2" name="Rectangle 1"/>
+          <p:cNvSpPr/>
+          <p:nvPr/>
+        </p:nvSpPr>
         <p:spPr>
           <a:xfrm>
             <a:off x="0" y="0"/>
@@ -3159,8 +3151,679 @@
           <a:prstGeom prst="rect">
             <a:avLst/>
           </a:prstGeom>
-        </p:spPr>
-      </p:pic>
+          <a:solidFill>
+            <a:srgbClr val="0A0A0F"/>
+          </a:solidFill>
+          <a:ln>
+            <a:noFill/>
+          </a:ln>
+        </p:spPr>
+        <p:style>
+          <a:lnRef idx="1">
+            <a:schemeClr val="accent1"/>
+          </a:lnRef>
+          <a:fillRef idx="3">
+            <a:schemeClr val="accent1"/>
+          </a:fillRef>
+          <a:effectRef idx="2">
+            <a:schemeClr val="accent1"/>
+          </a:effectRef>
+          <a:fontRef idx="minor">
+            <a:schemeClr val="lt1"/>
+          </a:fontRef>
+        </p:style>
+        <p:txBody>
+          <a:bodyPr rtlCol="0" anchor="ctr"/>
+          <a:lstStyle/>
+          <a:p>
+            <a:pPr algn="ctr"/>
+          </a:p>
+        </p:txBody>
+      </p:sp>
+      <p:sp>
+        <p:nvSpPr>
+          <p:cNvPr id="3" name="TextBox 2"/>
+          <p:cNvSpPr txBox="1"/>
+          <p:nvPr/>
+        </p:nvSpPr>
+        <p:spPr>
+          <a:xfrm>
+            <a:off x="914400" y="914400"/>
+            <a:ext cx="10363200" cy="152400"/>
+          </a:xfrm>
+          <a:prstGeom prst="rect">
+            <a:avLst/>
+          </a:prstGeom>
+          <a:noFill/>
+        </p:spPr>
+        <p:txBody>
+          <a:bodyPr wrap="square" lIns="0" rIns="0" tIns="0" bIns="0">
+            <a:spAutoFit/>
+          </a:bodyPr>
+          <a:lstStyle/>
+          <a:p>
+            <a:pPr algn="l"/>
+            <a:r>
+              <a:rPr sz="975" b="1" i="0" u="none">
+                <a:solidFill>
+                  <a:srgbClr val="A78BFA"/>
+                </a:solidFill>
+                <a:latin typeface="Inter"/>
+              </a:rPr>
+              <a:t>By the numbers</a:t>
+            </a:r>
+          </a:p>
+        </p:txBody>
+      </p:sp>
+      <p:sp>
+        <p:nvSpPr>
+          <p:cNvPr id="4" name="TextBox 3"/>
+          <p:cNvSpPr txBox="1"/>
+          <p:nvPr/>
+        </p:nvSpPr>
+        <p:spPr>
+          <a:xfrm>
+            <a:off x="914400" y="1295400"/>
+            <a:ext cx="8763000" cy="1120080"/>
+          </a:xfrm>
+          <a:prstGeom prst="rect">
+            <a:avLst/>
+          </a:prstGeom>
+          <a:noFill/>
+        </p:spPr>
+        <p:txBody>
+          <a:bodyPr wrap="square" lIns="0" rIns="0" tIns="0" bIns="0">
+            <a:spAutoFit/>
+          </a:bodyPr>
+          <a:lstStyle/>
+          <a:p>
+            <a:pPr algn="l"/>
+            <a:r>
+              <a:rPr sz="4200" b="1" i="0" u="none">
+                <a:solidFill>
+                  <a:srgbClr val="F5F5F7"/>
+                </a:solidFill>
+                <a:latin typeface="Inter"/>
+              </a:rPr>
+              <a:t>Editability that compounds across every deck you ship.</a:t>
+            </a:r>
+          </a:p>
+        </p:txBody>
+      </p:sp>
+      <p:sp>
+        <p:nvSpPr>
+          <p:cNvPr id="5" name="Rounded Rectangle 4"/>
+          <p:cNvSpPr/>
+          <p:nvPr/>
+        </p:nvSpPr>
+        <p:spPr>
+          <a:gradFill flip="none" rotWithShape="1">
+            <a:gsLst>
+              <a:gs pos="0">
+                <a:srgbClr val="FFFFFF">
+                  <a:alpha val="4000"/>
+                </a:srgbClr>
+              </a:gs>
+              <a:gs pos="100000">
+                <a:srgbClr val="FFFFFF">
+                  <a:alpha val="2000"/>
+                </a:srgbClr>
+              </a:gs>
+            </a:gsLst>
+            <a:lin ang="5400000" scaled="0"/>
+          </a:gradFill>
+          <a:xfrm>
+            <a:off x="914400" y="2948880"/>
+            <a:ext cx="3294311" cy="2724150"/>
+          </a:xfrm>
+          <a:prstGeom prst="roundRect">
+            <a:avLst/>
+          </a:prstGeom>
+          <a:ln w="9525">
+            <a:solidFill>
+              <a:srgbClr val="FFFFFF"/>
+            </a:solidFill>
+          </a:ln>
+        </p:spPr>
+        <p:style>
+          <a:lnRef idx="1">
+            <a:schemeClr val="accent1"/>
+          </a:lnRef>
+          <a:fillRef idx="3">
+            <a:schemeClr val="accent1"/>
+          </a:fillRef>
+          <a:effectRef idx="2">
+            <a:schemeClr val="accent1"/>
+          </a:effectRef>
+          <a:fontRef idx="minor">
+            <a:schemeClr val="lt1"/>
+          </a:fontRef>
+        </p:style>
+        <p:txBody>
+          <a:bodyPr rtlCol="0" anchor="ctr"/>
+          <a:lstStyle/>
+          <a:p>
+            <a:pPr algn="ctr"/>
+          </a:p>
+        </p:txBody>
+      </p:sp>
+      <p:sp>
+        <p:nvSpPr>
+          <p:cNvPr id="6" name="TextBox 5"/>
+          <p:cNvSpPr txBox="1"/>
+          <p:nvPr/>
+        </p:nvSpPr>
+        <p:spPr>
+          <a:xfrm>
+            <a:off x="1304925" y="3339405"/>
+            <a:ext cx="2513261" cy="914400"/>
+          </a:xfrm>
+          <a:prstGeom prst="rect">
+            <a:avLst/>
+          </a:prstGeom>
+          <a:noFill/>
+        </p:spPr>
+        <p:txBody>
+          <a:bodyPr wrap="square" lIns="0" rIns="0" tIns="0" bIns="0">
+            <a:spAutoFit/>
+          </a:bodyPr>
+          <a:lstStyle/>
+          <a:p>
+            <a:pPr algn="l"/>
+            <a:r>
+              <a:rPr sz="7200" b="1" i="0" u="none">
+                <a:solidFill>
+                  <a:srgbClr val="F5F5F7"/>
+                </a:solidFill>
+                <a:latin typeface="Inter"/>
+              </a:rPr>
+              <a:t>87</a:t>
+            </a:r>
+            <a:r>
+              <a:rPr sz="3600" b="1" i="0" u="none">
+                <a:solidFill>
+                  <a:srgbClr val="A78BFA"/>
+                </a:solidFill>
+                <a:latin typeface="Inter"/>
+              </a:rPr>
+              <a:t>%</a:t>
+            </a:r>
+          </a:p>
+        </p:txBody>
+      </p:sp>
+      <p:sp>
+        <p:nvSpPr>
+          <p:cNvPr id="7" name="TextBox 6"/>
+          <p:cNvSpPr txBox="1"/>
+          <p:nvPr/>
+        </p:nvSpPr>
+        <p:spPr>
+          <a:xfrm>
+            <a:off x="1304925" y="4330005"/>
+            <a:ext cx="2513261" cy="200025"/>
+          </a:xfrm>
+          <a:prstGeom prst="rect">
+            <a:avLst/>
+          </a:prstGeom>
+          <a:noFill/>
+        </p:spPr>
+        <p:txBody>
+          <a:bodyPr wrap="square" lIns="0" rIns="0" tIns="0" bIns="0">
+            <a:spAutoFit/>
+          </a:bodyPr>
+          <a:lstStyle/>
+          <a:p>
+            <a:pPr algn="l"/>
+            <a:r>
+              <a:rPr sz="1350" b="1" i="0" u="none">
+                <a:solidFill>
+                  <a:srgbClr val="D4D4D8"/>
+                </a:solidFill>
+                <a:latin typeface="Inter"/>
+              </a:rPr>
+              <a:t>Native area ratio</a:t>
+            </a:r>
+          </a:p>
+        </p:txBody>
+      </p:sp>
+      <p:sp>
+        <p:nvSpPr>
+          <p:cNvPr id="8" name="TextBox 7"/>
+          <p:cNvSpPr txBox="1"/>
+          <p:nvPr/>
+        </p:nvSpPr>
+        <p:spPr>
+          <a:xfrm>
+            <a:off x="1304925" y="4682430"/>
+            <a:ext cx="2513261" cy="600075"/>
+          </a:xfrm>
+          <a:prstGeom prst="rect">
+            <a:avLst/>
+          </a:prstGeom>
+          <a:noFill/>
+        </p:spPr>
+        <p:txBody>
+          <a:bodyPr wrap="square" lIns="0" rIns="0" tIns="0" bIns="0">
+            <a:spAutoFit/>
+          </a:bodyPr>
+          <a:lstStyle/>
+          <a:p>
+            <a:pPr algn="l"/>
+            <a:r>
+              <a:rPr sz="1050" b="0" i="0" u="none">
+                <a:solidFill>
+                  <a:srgbClr val="71717A"/>
+                </a:solidFill>
+                <a:latin typeface="Inter"/>
+              </a:rPr>
+              <a:t>Average across the 200-deck Genspark + v0 corpus. 0.95 stretch target.</a:t>
+            </a:r>
+          </a:p>
+        </p:txBody>
+      </p:sp>
+      <p:sp>
+        <p:nvSpPr>
+          <p:cNvPr id="9" name="Rounded Rectangle 8"/>
+          <p:cNvSpPr/>
+          <p:nvPr/>
+        </p:nvSpPr>
+        <p:spPr>
+          <a:gradFill flip="none" rotWithShape="1">
+            <a:gsLst>
+              <a:gs pos="0">
+                <a:srgbClr val="FFFFFF">
+                  <a:alpha val="4000"/>
+                </a:srgbClr>
+              </a:gs>
+              <a:gs pos="100000">
+                <a:srgbClr val="FFFFFF">
+                  <a:alpha val="2000"/>
+                </a:srgbClr>
+              </a:gs>
+            </a:gsLst>
+            <a:lin ang="5400000" scaled="0"/>
+          </a:gradFill>
+          <a:xfrm>
+            <a:off x="4437311" y="2948880"/>
+            <a:ext cx="3294459" cy="2724150"/>
+          </a:xfrm>
+          <a:prstGeom prst="roundRect">
+            <a:avLst/>
+          </a:prstGeom>
+          <a:ln w="9525">
+            <a:solidFill>
+              <a:srgbClr val="FFFFFF"/>
+            </a:solidFill>
+          </a:ln>
+        </p:spPr>
+        <p:style>
+          <a:lnRef idx="1">
+            <a:schemeClr val="accent1"/>
+          </a:lnRef>
+          <a:fillRef idx="3">
+            <a:schemeClr val="accent1"/>
+          </a:fillRef>
+          <a:effectRef idx="2">
+            <a:schemeClr val="accent1"/>
+          </a:effectRef>
+          <a:fontRef idx="minor">
+            <a:schemeClr val="lt1"/>
+          </a:fontRef>
+        </p:style>
+        <p:txBody>
+          <a:bodyPr rtlCol="0" anchor="ctr"/>
+          <a:lstStyle/>
+          <a:p>
+            <a:pPr algn="ctr"/>
+          </a:p>
+        </p:txBody>
+      </p:sp>
+      <p:sp>
+        <p:nvSpPr>
+          <p:cNvPr id="10" name="TextBox 9"/>
+          <p:cNvSpPr txBox="1"/>
+          <p:nvPr/>
+        </p:nvSpPr>
+        <p:spPr>
+          <a:xfrm>
+            <a:off x="4827836" y="3339405"/>
+            <a:ext cx="2513409" cy="914400"/>
+          </a:xfrm>
+          <a:prstGeom prst="rect">
+            <a:avLst/>
+          </a:prstGeom>
+          <a:noFill/>
+        </p:spPr>
+        <p:txBody>
+          <a:bodyPr wrap="square" lIns="0" rIns="0" tIns="0" bIns="0">
+            <a:spAutoFit/>
+          </a:bodyPr>
+          <a:lstStyle/>
+          <a:p>
+            <a:pPr algn="l"/>
+            <a:r>
+              <a:rPr sz="7200" b="1" i="0" u="none">
+                <a:solidFill>
+                  <a:srgbClr val="F5F5F7"/>
+                </a:solidFill>
+                <a:latin typeface="Inter"/>
+              </a:rPr>
+              <a:t>23</a:t>
+            </a:r>
+            <a:r>
+              <a:rPr sz="3600" b="1" i="0" u="none">
+                <a:solidFill>
+                  <a:srgbClr val="A78BFA"/>
+                </a:solidFill>
+                <a:latin typeface="Inter"/>
+              </a:rPr>
+              <a:t>s</a:t>
+            </a:r>
+          </a:p>
+        </p:txBody>
+      </p:sp>
+      <p:sp>
+        <p:nvSpPr>
+          <p:cNvPr id="11" name="TextBox 10"/>
+          <p:cNvSpPr txBox="1"/>
+          <p:nvPr/>
+        </p:nvSpPr>
+        <p:spPr>
+          <a:xfrm>
+            <a:off x="4827836" y="4330005"/>
+            <a:ext cx="2513409" cy="200025"/>
+          </a:xfrm>
+          <a:prstGeom prst="rect">
+            <a:avLst/>
+          </a:prstGeom>
+          <a:noFill/>
+        </p:spPr>
+        <p:txBody>
+          <a:bodyPr wrap="square" lIns="0" rIns="0" tIns="0" bIns="0">
+            <a:spAutoFit/>
+          </a:bodyPr>
+          <a:lstStyle/>
+          <a:p>
+            <a:pPr algn="l"/>
+            <a:r>
+              <a:rPr sz="1350" b="1" i="0" u="none">
+                <a:solidFill>
+                  <a:srgbClr val="D4D4D8"/>
+                </a:solidFill>
+                <a:latin typeface="Inter"/>
+              </a:rPr>
+              <a:t>Per 10-slide deck</a:t>
+            </a:r>
+          </a:p>
+        </p:txBody>
+      </p:sp>
+      <p:sp>
+        <p:nvSpPr>
+          <p:cNvPr id="12" name="TextBox 11"/>
+          <p:cNvSpPr txBox="1"/>
+          <p:nvPr/>
+        </p:nvSpPr>
+        <p:spPr>
+          <a:xfrm>
+            <a:off x="4827836" y="4682430"/>
+            <a:ext cx="2513409" cy="400050"/>
+          </a:xfrm>
+          <a:prstGeom prst="rect">
+            <a:avLst/>
+          </a:prstGeom>
+          <a:noFill/>
+        </p:spPr>
+        <p:txBody>
+          <a:bodyPr wrap="square" lIns="0" rIns="0" tIns="0" bIns="0">
+            <a:spAutoFit/>
+          </a:bodyPr>
+          <a:lstStyle/>
+          <a:p>
+            <a:pPr algn="l"/>
+            <a:r>
+              <a:rPr sz="1050" b="0" i="0" u="none">
+                <a:solidFill>
+                  <a:srgbClr val="71717A"/>
+                </a:solidFill>
+                <a:latin typeface="Inter"/>
+              </a:rPr>
+              <a:t>P95 conversion time on a single 8-core box, no GPU. 4-way render parallelism.</a:t>
+            </a:r>
+          </a:p>
+        </p:txBody>
+      </p:sp>
+      <p:sp>
+        <p:nvSpPr>
+          <p:cNvPr id="13" name="Rounded Rectangle 12"/>
+          <p:cNvSpPr/>
+          <p:nvPr/>
+        </p:nvSpPr>
+        <p:spPr>
+          <a:gradFill flip="none" rotWithShape="1">
+            <a:gsLst>
+              <a:gs pos="0">
+                <a:srgbClr val="FFFFFF">
+                  <a:alpha val="4000"/>
+                </a:srgbClr>
+              </a:gs>
+              <a:gs pos="100000">
+                <a:srgbClr val="FFFFFF">
+                  <a:alpha val="2000"/>
+                </a:srgbClr>
+              </a:gs>
+            </a:gsLst>
+            <a:lin ang="5400000" scaled="0"/>
+          </a:gradFill>
+          <a:xfrm>
+            <a:off x="7960370" y="2948880"/>
+            <a:ext cx="3317230" cy="2724150"/>
+          </a:xfrm>
+          <a:prstGeom prst="roundRect">
+            <a:avLst/>
+          </a:prstGeom>
+          <a:ln w="9525">
+            <a:solidFill>
+              <a:srgbClr val="FFFFFF"/>
+            </a:solidFill>
+          </a:ln>
+        </p:spPr>
+        <p:style>
+          <a:lnRef idx="1">
+            <a:schemeClr val="accent1"/>
+          </a:lnRef>
+          <a:fillRef idx="3">
+            <a:schemeClr val="accent1"/>
+          </a:fillRef>
+          <a:effectRef idx="2">
+            <a:schemeClr val="accent1"/>
+          </a:effectRef>
+          <a:fontRef idx="minor">
+            <a:schemeClr val="lt1"/>
+          </a:fontRef>
+        </p:style>
+        <p:txBody>
+          <a:bodyPr rtlCol="0" anchor="ctr"/>
+          <a:lstStyle/>
+          <a:p>
+            <a:pPr algn="ctr"/>
+          </a:p>
+        </p:txBody>
+      </p:sp>
+      <p:sp>
+        <p:nvSpPr>
+          <p:cNvPr id="14" name="TextBox 13"/>
+          <p:cNvSpPr txBox="1"/>
+          <p:nvPr/>
+        </p:nvSpPr>
+        <p:spPr>
+          <a:xfrm>
+            <a:off x="8350895" y="3339405"/>
+            <a:ext cx="2536180" cy="914400"/>
+          </a:xfrm>
+          <a:prstGeom prst="rect">
+            <a:avLst/>
+          </a:prstGeom>
+          <a:noFill/>
+        </p:spPr>
+        <p:txBody>
+          <a:bodyPr wrap="square" lIns="0" rIns="0" tIns="0" bIns="0">
+            <a:spAutoFit/>
+          </a:bodyPr>
+          <a:lstStyle/>
+          <a:p>
+            <a:pPr algn="l"/>
+            <a:r>
+              <a:rPr sz="7200" b="1" i="0" u="none">
+                <a:solidFill>
+                  <a:srgbClr val="F5F5F7"/>
+                </a:solidFill>
+                <a:latin typeface="Inter"/>
+              </a:rPr>
+              <a:t>$0.04</a:t>
+            </a:r>
+          </a:p>
+        </p:txBody>
+      </p:sp>
+      <p:sp>
+        <p:nvSpPr>
+          <p:cNvPr id="15" name="TextBox 14"/>
+          <p:cNvSpPr txBox="1"/>
+          <p:nvPr/>
+        </p:nvSpPr>
+        <p:spPr>
+          <a:xfrm>
+            <a:off x="8350895" y="4330005"/>
+            <a:ext cx="2536180" cy="200025"/>
+          </a:xfrm>
+          <a:prstGeom prst="rect">
+            <a:avLst/>
+          </a:prstGeom>
+          <a:noFill/>
+        </p:spPr>
+        <p:txBody>
+          <a:bodyPr wrap="square" lIns="0" rIns="0" tIns="0" bIns="0">
+            <a:spAutoFit/>
+          </a:bodyPr>
+          <a:lstStyle/>
+          <a:p>
+            <a:pPr algn="l"/>
+            <a:r>
+              <a:rPr sz="1350" b="1" i="0" u="none">
+                <a:solidFill>
+                  <a:srgbClr val="D4D4D8"/>
+                </a:solidFill>
+                <a:latin typeface="Inter"/>
+              </a:rPr>
+              <a:t>LLM cost per deck</a:t>
+            </a:r>
+          </a:p>
+        </p:txBody>
+      </p:sp>
+      <p:sp>
+        <p:nvSpPr>
+          <p:cNvPr id="16" name="TextBox 15"/>
+          <p:cNvSpPr txBox="1"/>
+          <p:nvPr/>
+        </p:nvSpPr>
+        <p:spPr>
+          <a:xfrm>
+            <a:off x="8350895" y="4682430"/>
+            <a:ext cx="2536180" cy="400050"/>
+          </a:xfrm>
+          <a:prstGeom prst="rect">
+            <a:avLst/>
+          </a:prstGeom>
+          <a:noFill/>
+        </p:spPr>
+        <p:txBody>
+          <a:bodyPr wrap="square" lIns="0" rIns="0" tIns="0" bIns="0">
+            <a:spAutoFit/>
+          </a:bodyPr>
+          <a:lstStyle/>
+          <a:p>
+            <a:pPr algn="l"/>
+            <a:r>
+              <a:rPr sz="1050" b="0" i="0" u="none">
+                <a:solidFill>
+                  <a:srgbClr val="71717A"/>
+                </a:solidFill>
+                <a:latin typeface="Inter"/>
+              </a:rPr>
+              <a:t>Three-tier classifier means tier-3 only fires on the ambiguous 10%.</a:t>
+            </a:r>
+          </a:p>
+        </p:txBody>
+      </p:sp>
+      <p:sp>
+        <p:nvSpPr>
+          <p:cNvPr id="17" name="TextBox 16"/>
+          <p:cNvSpPr txBox="1"/>
+          <p:nvPr/>
+        </p:nvSpPr>
+        <p:spPr>
+          <a:xfrm>
+            <a:off x="914400" y="6248400"/>
+            <a:ext cx="2913757" cy="152400"/>
+          </a:xfrm>
+          <a:prstGeom prst="rect">
+            <a:avLst/>
+          </a:prstGeom>
+          <a:noFill/>
+        </p:spPr>
+        <p:txBody>
+          <a:bodyPr wrap="square" lIns="0" rIns="0" tIns="0" bIns="0">
+            <a:spAutoFit/>
+          </a:bodyPr>
+          <a:lstStyle/>
+          <a:p>
+            <a:pPr algn="l"/>
+            <a:r>
+              <a:rPr sz="975" b="0" i="0" u="none">
+                <a:solidFill>
+                  <a:srgbClr val="52525B"/>
+                </a:solidFill>
+                <a:latin typeface="Inter"/>
+              </a:rPr>
+              <a:t>SOURCE · Internal benchmark, April 2026</a:t>
+            </a:r>
+          </a:p>
+        </p:txBody>
+      </p:sp>
+      <p:sp>
+        <p:nvSpPr>
+          <p:cNvPr id="18" name="TextBox 17"/>
+          <p:cNvSpPr txBox="1"/>
+          <p:nvPr/>
+        </p:nvSpPr>
+        <p:spPr>
+          <a:xfrm>
+            <a:off x="10768161" y="6248400"/>
+            <a:ext cx="509439" cy="152400"/>
+          </a:xfrm>
+          <a:prstGeom prst="rect">
+            <a:avLst/>
+          </a:prstGeom>
+          <a:noFill/>
+        </p:spPr>
+        <p:txBody>
+          <a:bodyPr wrap="square" lIns="0" rIns="0" tIns="0" bIns="0">
+            <a:spAutoFit/>
+          </a:bodyPr>
+          <a:lstStyle/>
+          <a:p>
+            <a:pPr algn="l"/>
+            <a:r>
+              <a:rPr sz="975" b="0" i="0" u="none">
+                <a:solidFill>
+                  <a:srgbClr val="52525B"/>
+                </a:solidFill>
+                <a:latin typeface="Inter"/>
+              </a:rPr>
+              <a:t>02 / 08</a:t>
+            </a:r>
+          </a:p>
+        </p:txBody>
+      </p:sp>
     </p:spTree>
   </p:cSld>
   <p:clrMapOvr>
@@ -3179,20 +3842,12 @@
         <p:nvPr/>
       </p:nvGrpSpPr>
       <p:grpSpPr/>
-      <p:pic>
-        <p:nvPicPr>
-          <p:cNvPr id="2" name="Picture 1" descr="image.png"/>
-          <p:cNvPicPr>
-            <a:picLocks noChangeAspect="1"/>
-          </p:cNvPicPr>
-          <p:nvPr/>
-        </p:nvPicPr>
-        <p:blipFill>
-          <a:blip r:embed="rId2"/>
-          <a:stretch>
-            <a:fillRect/>
-          </a:stretch>
-        </p:blipFill>
+      <p:sp>
+        <p:nvSpPr>
+          <p:cNvPr id="2" name="Rectangle 1"/>
+          <p:cNvSpPr/>
+          <p:nvPr/>
+        </p:nvSpPr>
         <p:spPr>
           <a:xfrm>
             <a:off x="0" y="0"/>
@@ -3201,8 +3856,1065 @@
           <a:prstGeom prst="rect">
             <a:avLst/>
           </a:prstGeom>
-        </p:spPr>
-      </p:pic>
+          <a:solidFill>
+            <a:srgbClr val="0A0A0F"/>
+          </a:solidFill>
+          <a:ln>
+            <a:noFill/>
+          </a:ln>
+        </p:spPr>
+        <p:style>
+          <a:lnRef idx="1">
+            <a:schemeClr val="accent1"/>
+          </a:lnRef>
+          <a:fillRef idx="3">
+            <a:schemeClr val="accent1"/>
+          </a:fillRef>
+          <a:effectRef idx="2">
+            <a:schemeClr val="accent1"/>
+          </a:effectRef>
+          <a:fontRef idx="minor">
+            <a:schemeClr val="lt1"/>
+          </a:fontRef>
+        </p:style>
+        <p:txBody>
+          <a:bodyPr rtlCol="0" anchor="ctr"/>
+          <a:lstStyle/>
+          <a:p>
+            <a:pPr algn="ctr"/>
+          </a:p>
+        </p:txBody>
+      </p:sp>
+      <p:sp>
+        <p:nvSpPr>
+          <p:cNvPr id="3" name="TextBox 2"/>
+          <p:cNvSpPr txBox="1"/>
+          <p:nvPr/>
+        </p:nvSpPr>
+        <p:spPr>
+          <a:xfrm>
+            <a:off x="914400" y="762000"/>
+            <a:ext cx="7239000" cy="959941"/>
+          </a:xfrm>
+          <a:prstGeom prst="rect">
+            <a:avLst/>
+          </a:prstGeom>
+          <a:noFill/>
+        </p:spPr>
+        <p:txBody>
+          <a:bodyPr wrap="square" lIns="0" rIns="0" tIns="0" bIns="0">
+            <a:spAutoFit/>
+          </a:bodyPr>
+          <a:lstStyle/>
+          <a:p>
+            <a:pPr algn="l"/>
+            <a:r>
+              <a:rPr sz="3600" b="1" i="0" u="none">
+                <a:solidFill>
+                  <a:srgbClr val="F5F5F7"/>
+                </a:solidFill>
+                <a:latin typeface="Inter"/>
+              </a:rPr>
+              <a:t>Six pillars of the rendering pipeline.</a:t>
+            </a:r>
+          </a:p>
+        </p:txBody>
+      </p:sp>
+      <p:sp>
+        <p:nvSpPr>
+          <p:cNvPr id="4" name="TextBox 3"/>
+          <p:cNvSpPr txBox="1"/>
+          <p:nvPr/>
+        </p:nvSpPr>
+        <p:spPr>
+          <a:xfrm>
+            <a:off x="10690771" y="1569541"/>
+            <a:ext cx="586829" cy="152400"/>
+          </a:xfrm>
+          <a:prstGeom prst="rect">
+            <a:avLst/>
+          </a:prstGeom>
+          <a:noFill/>
+        </p:spPr>
+        <p:txBody>
+          <a:bodyPr wrap="square" lIns="0" rIns="0" tIns="0" bIns="0">
+            <a:spAutoFit/>
+          </a:bodyPr>
+          <a:lstStyle/>
+          <a:p>
+            <a:pPr algn="l"/>
+            <a:r>
+              <a:rPr sz="975" b="1" i="0" u="none">
+                <a:solidFill>
+                  <a:srgbClr val="71717A"/>
+                </a:solidFill>
+                <a:latin typeface="Inter"/>
+              </a:rPr>
+              <a:t>03 / 08</a:t>
+            </a:r>
+          </a:p>
+        </p:txBody>
+      </p:sp>
+      <p:sp>
+        <p:nvSpPr>
+          <p:cNvPr id="5" name="Rounded Rectangle 4"/>
+          <p:cNvSpPr/>
+          <p:nvPr/>
+        </p:nvSpPr>
+        <p:spPr>
+          <a:xfrm>
+            <a:off x="914400" y="2179141"/>
+            <a:ext cx="3327350" cy="2190750"/>
+          </a:xfrm>
+          <a:prstGeom prst="roundRect">
+            <a:avLst/>
+          </a:prstGeom>
+          <a:solidFill>
+            <a:srgbClr val="FFFFFF"/>
+          </a:solidFill>
+          <a:ln w="9525">
+            <a:solidFill>
+              <a:srgbClr val="FFFFFF"/>
+            </a:solidFill>
+          </a:ln>
+        </p:spPr>
+        <p:style>
+          <a:lnRef idx="1">
+            <a:schemeClr val="accent1"/>
+          </a:lnRef>
+          <a:fillRef idx="3">
+            <a:schemeClr val="accent1"/>
+          </a:fillRef>
+          <a:effectRef idx="2">
+            <a:schemeClr val="accent1"/>
+          </a:effectRef>
+          <a:fontRef idx="minor">
+            <a:schemeClr val="lt1"/>
+          </a:fontRef>
+        </p:style>
+        <p:txBody>
+          <a:bodyPr rtlCol="0" anchor="ctr"/>
+          <a:lstStyle/>
+          <a:p>
+            <a:pPr algn="ctr"/>
+          </a:p>
+        </p:txBody>
+      </p:sp>
+      <p:sp>
+        <p:nvSpPr>
+          <p:cNvPr id="6" name="TextBox 5"/>
+          <p:cNvSpPr txBox="1"/>
+          <p:nvPr/>
+        </p:nvSpPr>
+        <p:spPr>
+          <a:gradFill flip="none" rotWithShape="1">
+            <a:gsLst>
+              <a:gs pos="0">
+                <a:srgbClr val="6366F1"/>
+              </a:gs>
+              <a:gs pos="100000">
+                <a:srgbClr val="8B5CF6"/>
+              </a:gs>
+            </a:gsLst>
+            <a:lin ang="2700000" scaled="0"/>
+          </a:gradFill>
+          <a:xfrm>
+            <a:off x="1190625" y="2455366"/>
+            <a:ext cx="419100" cy="419100"/>
+          </a:xfrm>
+          <a:prstGeom prst="rect">
+            <a:avLst/>
+          </a:prstGeom>
+        </p:spPr>
+        <p:txBody>
+          <a:bodyPr wrap="square" lIns="0" rIns="0" tIns="0" bIns="0">
+            <a:spAutoFit/>
+          </a:bodyPr>
+          <a:lstStyle/>
+          <a:p>
+            <a:pPr algn="l"/>
+            <a:r>
+              <a:rPr sz="1650" b="1" i="0" u="none">
+                <a:solidFill>
+                  <a:srgbClr val="FFFFFF"/>
+                </a:solidFill>
+                <a:latin typeface="Inter"/>
+              </a:rPr>
+              <a:t>▦</a:t>
+            </a:r>
+          </a:p>
+        </p:txBody>
+      </p:sp>
+      <p:sp>
+        <p:nvSpPr>
+          <p:cNvPr id="7" name="TextBox 6"/>
+          <p:cNvSpPr txBox="1"/>
+          <p:nvPr/>
+        </p:nvSpPr>
+        <p:spPr>
+          <a:xfrm>
+            <a:off x="1190625" y="3169146"/>
+            <a:ext cx="2774900" cy="228600"/>
+          </a:xfrm>
+          <a:prstGeom prst="rect">
+            <a:avLst/>
+          </a:prstGeom>
+          <a:noFill/>
+        </p:spPr>
+        <p:txBody>
+          <a:bodyPr wrap="square" lIns="0" rIns="0" tIns="0" bIns="0">
+            <a:spAutoFit/>
+          </a:bodyPr>
+          <a:lstStyle/>
+          <a:p>
+            <a:pPr algn="l"/>
+            <a:r>
+              <a:rPr sz="1500" b="1" i="0" u="none">
+                <a:solidFill>
+                  <a:srgbClr val="F5F5F7"/>
+                </a:solidFill>
+                <a:latin typeface="Inter"/>
+              </a:rPr>
+              <a:t>Render before decide</a:t>
+            </a:r>
+          </a:p>
+        </p:txBody>
+      </p:sp>
+      <p:sp>
+        <p:nvSpPr>
+          <p:cNvPr id="8" name="TextBox 7"/>
+          <p:cNvSpPr txBox="1"/>
+          <p:nvPr/>
+        </p:nvSpPr>
+        <p:spPr>
+          <a:xfrm>
+            <a:off x="1190625" y="3473946"/>
+            <a:ext cx="2774900" cy="619720"/>
+          </a:xfrm>
+          <a:prstGeom prst="rect">
+            <a:avLst/>
+          </a:prstGeom>
+          <a:noFill/>
+        </p:spPr>
+        <p:txBody>
+          <a:bodyPr wrap="square" lIns="0" rIns="0" tIns="0" bIns="0">
+            <a:spAutoFit/>
+          </a:bodyPr>
+          <a:lstStyle/>
+          <a:p>
+            <a:pPr algn="l"/>
+            <a:r>
+              <a:rPr sz="1050" b="0" i="0" u="none">
+                <a:solidFill>
+                  <a:srgbClr val="A1A1AA"/>
+                </a:solidFill>
+                <a:latin typeface="Inter"/>
+              </a:rPr>
+              <a:t>Real Chromium computes layout. Static analysis cannot resolve flex/grid/flow geometry.</a:t>
+            </a:r>
+          </a:p>
+        </p:txBody>
+      </p:sp>
+      <p:sp>
+        <p:nvSpPr>
+          <p:cNvPr id="9" name="Rounded Rectangle 8"/>
+          <p:cNvSpPr/>
+          <p:nvPr/>
+        </p:nvSpPr>
+        <p:spPr>
+          <a:xfrm>
+            <a:off x="4432250" y="2179141"/>
+            <a:ext cx="3327350" cy="2190750"/>
+          </a:xfrm>
+          <a:prstGeom prst="roundRect">
+            <a:avLst/>
+          </a:prstGeom>
+          <a:solidFill>
+            <a:srgbClr val="FFFFFF"/>
+          </a:solidFill>
+          <a:ln w="9525">
+            <a:solidFill>
+              <a:srgbClr val="FFFFFF"/>
+            </a:solidFill>
+          </a:ln>
+        </p:spPr>
+        <p:style>
+          <a:lnRef idx="1">
+            <a:schemeClr val="accent1"/>
+          </a:lnRef>
+          <a:fillRef idx="3">
+            <a:schemeClr val="accent1"/>
+          </a:fillRef>
+          <a:effectRef idx="2">
+            <a:schemeClr val="accent1"/>
+          </a:effectRef>
+          <a:fontRef idx="minor">
+            <a:schemeClr val="lt1"/>
+          </a:fontRef>
+        </p:style>
+        <p:txBody>
+          <a:bodyPr rtlCol="0" anchor="ctr"/>
+          <a:lstStyle/>
+          <a:p>
+            <a:pPr algn="ctr"/>
+          </a:p>
+        </p:txBody>
+      </p:sp>
+      <p:sp>
+        <p:nvSpPr>
+          <p:cNvPr id="10" name="TextBox 9"/>
+          <p:cNvSpPr txBox="1"/>
+          <p:nvPr/>
+        </p:nvSpPr>
+        <p:spPr>
+          <a:gradFill flip="none" rotWithShape="1">
+            <a:gsLst>
+              <a:gs pos="0">
+                <a:srgbClr val="8B5CF6"/>
+              </a:gs>
+              <a:gs pos="100000">
+                <a:srgbClr val="EC4899"/>
+              </a:gs>
+            </a:gsLst>
+            <a:lin ang="2700000" scaled="0"/>
+          </a:gradFill>
+          <a:xfrm>
+            <a:off x="4708475" y="2455366"/>
+            <a:ext cx="419100" cy="419100"/>
+          </a:xfrm>
+          <a:prstGeom prst="rect">
+            <a:avLst/>
+          </a:prstGeom>
+        </p:spPr>
+        <p:txBody>
+          <a:bodyPr wrap="square" lIns="0" rIns="0" tIns="0" bIns="0">
+            <a:spAutoFit/>
+          </a:bodyPr>
+          <a:lstStyle/>
+          <a:p>
+            <a:pPr algn="l"/>
+            <a:r>
+              <a:rPr sz="1650" b="1" i="0" u="none">
+                <a:solidFill>
+                  <a:srgbClr val="FFFFFF"/>
+                </a:solidFill>
+                <a:latin typeface="Inter"/>
+              </a:rPr>
+              <a:t>◈</a:t>
+            </a:r>
+          </a:p>
+        </p:txBody>
+      </p:sp>
+      <p:sp>
+        <p:nvSpPr>
+          <p:cNvPr id="11" name="TextBox 10"/>
+          <p:cNvSpPr txBox="1"/>
+          <p:nvPr/>
+        </p:nvSpPr>
+        <p:spPr>
+          <a:xfrm>
+            <a:off x="4708475" y="3169146"/>
+            <a:ext cx="2774900" cy="228600"/>
+          </a:xfrm>
+          <a:prstGeom prst="rect">
+            <a:avLst/>
+          </a:prstGeom>
+          <a:noFill/>
+        </p:spPr>
+        <p:txBody>
+          <a:bodyPr wrap="square" lIns="0" rIns="0" tIns="0" bIns="0">
+            <a:spAutoFit/>
+          </a:bodyPr>
+          <a:lstStyle/>
+          <a:p>
+            <a:pPr algn="l"/>
+            <a:r>
+              <a:rPr sz="1500" b="1" i="0" u="none">
+                <a:solidFill>
+                  <a:srgbClr val="F5F5F7"/>
+                </a:solidFill>
+                <a:latin typeface="Inter"/>
+              </a:rPr>
+              <a:t>Visual units, not DOM</a:t>
+            </a:r>
+          </a:p>
+        </p:txBody>
+      </p:sp>
+      <p:sp>
+        <p:nvSpPr>
+          <p:cNvPr id="12" name="TextBox 11"/>
+          <p:cNvSpPr txBox="1"/>
+          <p:nvPr/>
+        </p:nvSpPr>
+        <p:spPr>
+          <a:xfrm>
+            <a:off x="4708475" y="3473946"/>
+            <a:ext cx="2774900" cy="619720"/>
+          </a:xfrm>
+          <a:prstGeom prst="rect">
+            <a:avLst/>
+          </a:prstGeom>
+          <a:noFill/>
+        </p:spPr>
+        <p:txBody>
+          <a:bodyPr wrap="square" lIns="0" rIns="0" tIns="0" bIns="0">
+            <a:spAutoFit/>
+          </a:bodyPr>
+          <a:lstStyle/>
+          <a:p>
+            <a:pPr algn="l"/>
+            <a:r>
+              <a:rPr sz="1050" b="0" i="0" u="none">
+                <a:solidFill>
+                  <a:srgbClr val="A1A1AA"/>
+                </a:solidFill>
+                <a:latin typeface="Inter"/>
+              </a:rPr>
+              <a:t>The classification atom is a connected visual region — a card, a bullet, a chart — not a single tag.</a:t>
+            </a:r>
+          </a:p>
+        </p:txBody>
+      </p:sp>
+      <p:sp>
+        <p:nvSpPr>
+          <p:cNvPr id="13" name="Rounded Rectangle 12"/>
+          <p:cNvSpPr/>
+          <p:nvPr/>
+        </p:nvSpPr>
+        <p:spPr>
+          <a:xfrm>
+            <a:off x="7950101" y="2179141"/>
+            <a:ext cx="3327499" cy="2190750"/>
+          </a:xfrm>
+          <a:prstGeom prst="roundRect">
+            <a:avLst/>
+          </a:prstGeom>
+          <a:solidFill>
+            <a:srgbClr val="FFFFFF"/>
+          </a:solidFill>
+          <a:ln w="9525">
+            <a:solidFill>
+              <a:srgbClr val="FFFFFF"/>
+            </a:solidFill>
+          </a:ln>
+        </p:spPr>
+        <p:style>
+          <a:lnRef idx="1">
+            <a:schemeClr val="accent1"/>
+          </a:lnRef>
+          <a:fillRef idx="3">
+            <a:schemeClr val="accent1"/>
+          </a:fillRef>
+          <a:effectRef idx="2">
+            <a:schemeClr val="accent1"/>
+          </a:effectRef>
+          <a:fontRef idx="minor">
+            <a:schemeClr val="lt1"/>
+          </a:fontRef>
+        </p:style>
+        <p:txBody>
+          <a:bodyPr rtlCol="0" anchor="ctr"/>
+          <a:lstStyle/>
+          <a:p>
+            <a:pPr algn="ctr"/>
+          </a:p>
+        </p:txBody>
+      </p:sp>
+      <p:sp>
+        <p:nvSpPr>
+          <p:cNvPr id="14" name="TextBox 13"/>
+          <p:cNvSpPr txBox="1"/>
+          <p:nvPr/>
+        </p:nvSpPr>
+        <p:spPr>
+          <a:gradFill flip="none" rotWithShape="1">
+            <a:gsLst>
+              <a:gs pos="0">
+                <a:srgbClr val="EC4899"/>
+              </a:gs>
+              <a:gs pos="100000">
+                <a:srgbClr val="F97316"/>
+              </a:gs>
+            </a:gsLst>
+            <a:lin ang="2700000" scaled="0"/>
+          </a:gradFill>
+          <a:xfrm>
+            <a:off x="8226326" y="2455366"/>
+            <a:ext cx="419100" cy="419100"/>
+          </a:xfrm>
+          <a:prstGeom prst="rect">
+            <a:avLst/>
+          </a:prstGeom>
+        </p:spPr>
+        <p:txBody>
+          <a:bodyPr wrap="square" lIns="0" rIns="0" tIns="0" bIns="0">
+            <a:spAutoFit/>
+          </a:bodyPr>
+          <a:lstStyle/>
+          <a:p>
+            <a:pPr algn="l"/>
+            <a:r>
+              <a:rPr sz="1650" b="1" i="0" u="none">
+                <a:solidFill>
+                  <a:srgbClr val="FFFFFF"/>
+                </a:solidFill>
+                <a:latin typeface="Inter"/>
+              </a:rPr>
+              <a:t>⊞</a:t>
+            </a:r>
+          </a:p>
+        </p:txBody>
+      </p:sp>
+      <p:sp>
+        <p:nvSpPr>
+          <p:cNvPr id="15" name="TextBox 14"/>
+          <p:cNvSpPr txBox="1"/>
+          <p:nvPr/>
+        </p:nvSpPr>
+        <p:spPr>
+          <a:xfrm>
+            <a:off x="8226326" y="3375720"/>
+            <a:ext cx="2775049" cy="228600"/>
+          </a:xfrm>
+          <a:prstGeom prst="rect">
+            <a:avLst/>
+          </a:prstGeom>
+          <a:noFill/>
+        </p:spPr>
+        <p:txBody>
+          <a:bodyPr wrap="square" lIns="0" rIns="0" tIns="0" bIns="0">
+            <a:spAutoFit/>
+          </a:bodyPr>
+          <a:lstStyle/>
+          <a:p>
+            <a:pPr algn="l"/>
+            <a:r>
+              <a:rPr sz="1500" b="1" i="0" u="none">
+                <a:solidFill>
+                  <a:srgbClr val="F5F5F7"/>
+                </a:solidFill>
+                <a:latin typeface="Inter"/>
+              </a:rPr>
+              <a:t>Three-tier classifier</a:t>
+            </a:r>
+          </a:p>
+        </p:txBody>
+      </p:sp>
+      <p:sp>
+        <p:nvSpPr>
+          <p:cNvPr id="16" name="TextBox 15"/>
+          <p:cNvSpPr txBox="1"/>
+          <p:nvPr/>
+        </p:nvSpPr>
+        <p:spPr>
+          <a:xfrm>
+            <a:off x="8226326" y="3680520"/>
+            <a:ext cx="2775049" cy="413147"/>
+          </a:xfrm>
+          <a:prstGeom prst="rect">
+            <a:avLst/>
+          </a:prstGeom>
+          <a:noFill/>
+        </p:spPr>
+        <p:txBody>
+          <a:bodyPr wrap="square" lIns="0" rIns="0" tIns="0" bIns="0">
+            <a:spAutoFit/>
+          </a:bodyPr>
+          <a:lstStyle/>
+          <a:p>
+            <a:pPr algn="l"/>
+            <a:r>
+              <a:rPr sz="1050" b="0" i="0" u="none">
+                <a:solidFill>
+                  <a:srgbClr val="A1A1AA"/>
+                </a:solidFill>
+                <a:latin typeface="Inter"/>
+              </a:rPr>
+              <a:t>Rules → heuristics → LLM. 70% decided free, 20% by score, 10% adjudicated.</a:t>
+            </a:r>
+          </a:p>
+        </p:txBody>
+      </p:sp>
+      <p:sp>
+        <p:nvSpPr>
+          <p:cNvPr id="17" name="Rounded Rectangle 16"/>
+          <p:cNvSpPr/>
+          <p:nvPr/>
+        </p:nvSpPr>
+        <p:spPr>
+          <a:xfrm>
+            <a:off x="914400" y="4560391"/>
+            <a:ext cx="3327350" cy="2190750"/>
+          </a:xfrm>
+          <a:prstGeom prst="roundRect">
+            <a:avLst/>
+          </a:prstGeom>
+          <a:solidFill>
+            <a:srgbClr val="FFFFFF"/>
+          </a:solidFill>
+          <a:ln w="9525">
+            <a:solidFill>
+              <a:srgbClr val="FFFFFF"/>
+            </a:solidFill>
+          </a:ln>
+        </p:spPr>
+        <p:style>
+          <a:lnRef idx="1">
+            <a:schemeClr val="accent1"/>
+          </a:lnRef>
+          <a:fillRef idx="3">
+            <a:schemeClr val="accent1"/>
+          </a:fillRef>
+          <a:effectRef idx="2">
+            <a:schemeClr val="accent1"/>
+          </a:effectRef>
+          <a:fontRef idx="minor">
+            <a:schemeClr val="lt1"/>
+          </a:fontRef>
+        </p:style>
+        <p:txBody>
+          <a:bodyPr rtlCol="0" anchor="ctr"/>
+          <a:lstStyle/>
+          <a:p>
+            <a:pPr algn="ctr"/>
+          </a:p>
+        </p:txBody>
+      </p:sp>
+      <p:sp>
+        <p:nvSpPr>
+          <p:cNvPr id="18" name="TextBox 17"/>
+          <p:cNvSpPr txBox="1"/>
+          <p:nvPr/>
+        </p:nvSpPr>
+        <p:spPr>
+          <a:gradFill flip="none" rotWithShape="1">
+            <a:gsLst>
+              <a:gs pos="0">
+                <a:srgbClr val="06B6D4"/>
+              </a:gs>
+              <a:gs pos="100000">
+                <a:srgbClr val="6366F1"/>
+              </a:gs>
+            </a:gsLst>
+            <a:lin ang="2700000" scaled="0"/>
+          </a:gradFill>
+          <a:xfrm>
+            <a:off x="1190625" y="4836616"/>
+            <a:ext cx="419100" cy="419100"/>
+          </a:xfrm>
+          <a:prstGeom prst="rect">
+            <a:avLst/>
+          </a:prstGeom>
+        </p:spPr>
+        <p:txBody>
+          <a:bodyPr wrap="square" lIns="0" rIns="0" tIns="0" bIns="0">
+            <a:spAutoFit/>
+          </a:bodyPr>
+          <a:lstStyle/>
+          <a:p>
+            <a:pPr algn="l"/>
+            <a:r>
+              <a:rPr sz="1650" b="1" i="0" u="none">
+                <a:solidFill>
+                  <a:srgbClr val="FFFFFF"/>
+                </a:solidFill>
+                <a:latin typeface="Inter"/>
+              </a:rPr>
+              <a:t>◐</a:t>
+            </a:r>
+          </a:p>
+        </p:txBody>
+      </p:sp>
+      <p:sp>
+        <p:nvSpPr>
+          <p:cNvPr id="19" name="TextBox 18"/>
+          <p:cNvSpPr txBox="1"/>
+          <p:nvPr/>
+        </p:nvSpPr>
+        <p:spPr>
+          <a:xfrm>
+            <a:off x="1190625" y="5756970"/>
+            <a:ext cx="2774900" cy="228600"/>
+          </a:xfrm>
+          <a:prstGeom prst="rect">
+            <a:avLst/>
+          </a:prstGeom>
+          <a:noFill/>
+        </p:spPr>
+        <p:txBody>
+          <a:bodyPr wrap="square" lIns="0" rIns="0" tIns="0" bIns="0">
+            <a:spAutoFit/>
+          </a:bodyPr>
+          <a:lstStyle/>
+          <a:p>
+            <a:pPr algn="l"/>
+            <a:r>
+              <a:rPr sz="1500" b="1" i="0" u="none">
+                <a:solidFill>
+                  <a:srgbClr val="F5F5F7"/>
+                </a:solidFill>
+                <a:latin typeface="Inter"/>
+              </a:rPr>
+              <a:t>Confidence aware</a:t>
+            </a:r>
+          </a:p>
+        </p:txBody>
+      </p:sp>
+      <p:sp>
+        <p:nvSpPr>
+          <p:cNvPr id="20" name="TextBox 19"/>
+          <p:cNvSpPr txBox="1"/>
+          <p:nvPr/>
+        </p:nvSpPr>
+        <p:spPr>
+          <a:xfrm>
+            <a:off x="1190625" y="6061770"/>
+            <a:ext cx="2774900" cy="413147"/>
+          </a:xfrm>
+          <a:prstGeom prst="rect">
+            <a:avLst/>
+          </a:prstGeom>
+          <a:noFill/>
+        </p:spPr>
+        <p:txBody>
+          <a:bodyPr wrap="square" lIns="0" rIns="0" tIns="0" bIns="0">
+            <a:spAutoFit/>
+          </a:bodyPr>
+          <a:lstStyle/>
+          <a:p>
+            <a:pPr algn="l"/>
+            <a:r>
+              <a:rPr sz="1050" b="0" i="0" u="none">
+                <a:solidFill>
+                  <a:srgbClr val="A1A1AA"/>
+                </a:solidFill>
+                <a:latin typeface="Inter"/>
+              </a:rPr>
+              <a:t>Every decision carries a confidence. Low confidence triggers dual-emit fallback.</a:t>
+            </a:r>
+          </a:p>
+        </p:txBody>
+      </p:sp>
+      <p:sp>
+        <p:nvSpPr>
+          <p:cNvPr id="21" name="Rounded Rectangle 20"/>
+          <p:cNvSpPr/>
+          <p:nvPr/>
+        </p:nvSpPr>
+        <p:spPr>
+          <a:xfrm>
+            <a:off x="4432250" y="4560391"/>
+            <a:ext cx="3327350" cy="2190750"/>
+          </a:xfrm>
+          <a:prstGeom prst="roundRect">
+            <a:avLst/>
+          </a:prstGeom>
+          <a:solidFill>
+            <a:srgbClr val="FFFFFF"/>
+          </a:solidFill>
+          <a:ln w="9525">
+            <a:solidFill>
+              <a:srgbClr val="FFFFFF"/>
+            </a:solidFill>
+          </a:ln>
+        </p:spPr>
+        <p:style>
+          <a:lnRef idx="1">
+            <a:schemeClr val="accent1"/>
+          </a:lnRef>
+          <a:fillRef idx="3">
+            <a:schemeClr val="accent1"/>
+          </a:fillRef>
+          <a:effectRef idx="2">
+            <a:schemeClr val="accent1"/>
+          </a:effectRef>
+          <a:fontRef idx="minor">
+            <a:schemeClr val="lt1"/>
+          </a:fontRef>
+        </p:style>
+        <p:txBody>
+          <a:bodyPr rtlCol="0" anchor="ctr"/>
+          <a:lstStyle/>
+          <a:p>
+            <a:pPr algn="ctr"/>
+          </a:p>
+        </p:txBody>
+      </p:sp>
+      <p:sp>
+        <p:nvSpPr>
+          <p:cNvPr id="22" name="TextBox 21"/>
+          <p:cNvSpPr txBox="1"/>
+          <p:nvPr/>
+        </p:nvSpPr>
+        <p:spPr>
+          <a:gradFill flip="none" rotWithShape="1">
+            <a:gsLst>
+              <a:gs pos="0">
+                <a:srgbClr val="22C55E"/>
+              </a:gs>
+              <a:gs pos="100000">
+                <a:srgbClr val="06B6D4"/>
+              </a:gs>
+            </a:gsLst>
+            <a:lin ang="2700000" scaled="0"/>
+          </a:gradFill>
+          <a:xfrm>
+            <a:off x="4708475" y="4836616"/>
+            <a:ext cx="419100" cy="419100"/>
+          </a:xfrm>
+          <a:prstGeom prst="rect">
+            <a:avLst/>
+          </a:prstGeom>
+        </p:spPr>
+        <p:txBody>
+          <a:bodyPr wrap="square" lIns="0" rIns="0" tIns="0" bIns="0">
+            <a:spAutoFit/>
+          </a:bodyPr>
+          <a:lstStyle/>
+          <a:p>
+            <a:pPr algn="l"/>
+            <a:r>
+              <a:rPr sz="1650" b="1" i="0" u="none">
+                <a:solidFill>
+                  <a:srgbClr val="FFFFFF"/>
+                </a:solidFill>
+                <a:latin typeface="Inter"/>
+              </a:rPr>
+              <a:t>✓</a:t>
+            </a:r>
+          </a:p>
+        </p:txBody>
+      </p:sp>
+      <p:sp>
+        <p:nvSpPr>
+          <p:cNvPr id="23" name="TextBox 22"/>
+          <p:cNvSpPr txBox="1"/>
+          <p:nvPr/>
+        </p:nvSpPr>
+        <p:spPr>
+          <a:xfrm>
+            <a:off x="4708475" y="5550396"/>
+            <a:ext cx="2774900" cy="228600"/>
+          </a:xfrm>
+          <a:prstGeom prst="rect">
+            <a:avLst/>
+          </a:prstGeom>
+          <a:noFill/>
+        </p:spPr>
+        <p:txBody>
+          <a:bodyPr wrap="square" lIns="0" rIns="0" tIns="0" bIns="0">
+            <a:spAutoFit/>
+          </a:bodyPr>
+          <a:lstStyle/>
+          <a:p>
+            <a:pPr algn="l"/>
+            <a:r>
+              <a:rPr sz="1500" b="1" i="0" u="none">
+                <a:solidFill>
+                  <a:srgbClr val="F5F5F7"/>
+                </a:solidFill>
+                <a:latin typeface="Inter"/>
+              </a:rPr>
+              <a:t>Self validating</a:t>
+            </a:r>
+          </a:p>
+        </p:txBody>
+      </p:sp>
+      <p:sp>
+        <p:nvSpPr>
+          <p:cNvPr id="24" name="TextBox 23"/>
+          <p:cNvSpPr txBox="1"/>
+          <p:nvPr/>
+        </p:nvSpPr>
+        <p:spPr>
+          <a:xfrm>
+            <a:off x="4708475" y="5855196"/>
+            <a:ext cx="2774900" cy="619720"/>
+          </a:xfrm>
+          <a:prstGeom prst="rect">
+            <a:avLst/>
+          </a:prstGeom>
+          <a:noFill/>
+        </p:spPr>
+        <p:txBody>
+          <a:bodyPr wrap="square" lIns="0" rIns="0" tIns="0" bIns="0">
+            <a:spAutoFit/>
+          </a:bodyPr>
+          <a:lstStyle/>
+          <a:p>
+            <a:pPr algn="l"/>
+            <a:r>
+              <a:rPr sz="1050" b="0" i="0" u="none">
+                <a:solidFill>
+                  <a:srgbClr val="A1A1AA"/>
+                </a:solidFill>
+                <a:latin typeface="Inter"/>
+              </a:rPr>
+              <a:t>SSIM + OCR oracle catches regressions. Failing regions auto-promote to raster and re-emit.</a:t>
+            </a:r>
+          </a:p>
+        </p:txBody>
+      </p:sp>
+      <p:sp>
+        <p:nvSpPr>
+          <p:cNvPr id="25" name="Rounded Rectangle 24"/>
+          <p:cNvSpPr/>
+          <p:nvPr/>
+        </p:nvSpPr>
+        <p:spPr>
+          <a:xfrm>
+            <a:off x="7950101" y="4560391"/>
+            <a:ext cx="3327499" cy="2190750"/>
+          </a:xfrm>
+          <a:prstGeom prst="roundRect">
+            <a:avLst/>
+          </a:prstGeom>
+          <a:solidFill>
+            <a:srgbClr val="FFFFFF"/>
+          </a:solidFill>
+          <a:ln w="9525">
+            <a:solidFill>
+              <a:srgbClr val="FFFFFF"/>
+            </a:solidFill>
+          </a:ln>
+        </p:spPr>
+        <p:style>
+          <a:lnRef idx="1">
+            <a:schemeClr val="accent1"/>
+          </a:lnRef>
+          <a:fillRef idx="3">
+            <a:schemeClr val="accent1"/>
+          </a:fillRef>
+          <a:effectRef idx="2">
+            <a:schemeClr val="accent1"/>
+          </a:effectRef>
+          <a:fontRef idx="minor">
+            <a:schemeClr val="lt1"/>
+          </a:fontRef>
+        </p:style>
+        <p:txBody>
+          <a:bodyPr rtlCol="0" anchor="ctr"/>
+          <a:lstStyle/>
+          <a:p>
+            <a:pPr algn="ctr"/>
+          </a:p>
+        </p:txBody>
+      </p:sp>
+      <p:sp>
+        <p:nvSpPr>
+          <p:cNvPr id="26" name="TextBox 25"/>
+          <p:cNvSpPr txBox="1"/>
+          <p:nvPr/>
+        </p:nvSpPr>
+        <p:spPr>
+          <a:gradFill flip="none" rotWithShape="1">
+            <a:gsLst>
+              <a:gs pos="0">
+                <a:srgbClr val="F97316"/>
+              </a:gs>
+              <a:gs pos="100000">
+                <a:srgbClr val="FACC15"/>
+              </a:gs>
+            </a:gsLst>
+            <a:lin ang="2700000" scaled="0"/>
+          </a:gradFill>
+          <a:xfrm>
+            <a:off x="8226326" y="4836616"/>
+            <a:ext cx="419100" cy="419100"/>
+          </a:xfrm>
+          <a:prstGeom prst="rect">
+            <a:avLst/>
+          </a:prstGeom>
+        </p:spPr>
+        <p:txBody>
+          <a:bodyPr wrap="square" lIns="0" rIns="0" tIns="0" bIns="0">
+            <a:spAutoFit/>
+          </a:bodyPr>
+          <a:lstStyle/>
+          <a:p>
+            <a:pPr algn="l"/>
+            <a:r>
+              <a:rPr sz="1650" b="1" i="0" u="none">
+                <a:solidFill>
+                  <a:srgbClr val="FFFFFF"/>
+                </a:solidFill>
+                <a:latin typeface="Inter"/>
+              </a:rPr>
+              <a:t>⌘</a:t>
+            </a:r>
+          </a:p>
+        </p:txBody>
+      </p:sp>
+      <p:sp>
+        <p:nvSpPr>
+          <p:cNvPr id="27" name="TextBox 26"/>
+          <p:cNvSpPr txBox="1"/>
+          <p:nvPr/>
+        </p:nvSpPr>
+        <p:spPr>
+          <a:xfrm>
+            <a:off x="8226326" y="5550396"/>
+            <a:ext cx="2775049" cy="228600"/>
+          </a:xfrm>
+          <a:prstGeom prst="rect">
+            <a:avLst/>
+          </a:prstGeom>
+          <a:noFill/>
+        </p:spPr>
+        <p:txBody>
+          <a:bodyPr wrap="square" lIns="0" rIns="0" tIns="0" bIns="0">
+            <a:spAutoFit/>
+          </a:bodyPr>
+          <a:lstStyle/>
+          <a:p>
+            <a:pPr algn="l"/>
+            <a:r>
+              <a:rPr sz="1500" b="1" i="0" u="none">
+                <a:solidFill>
+                  <a:srgbClr val="F5F5F7"/>
+                </a:solidFill>
+                <a:latin typeface="Inter"/>
+              </a:rPr>
+              <a:t>Cache aggressively</a:t>
+            </a:r>
+          </a:p>
+        </p:txBody>
+      </p:sp>
+      <p:sp>
+        <p:nvSpPr>
+          <p:cNvPr id="28" name="TextBox 27"/>
+          <p:cNvSpPr txBox="1"/>
+          <p:nvPr/>
+        </p:nvSpPr>
+        <p:spPr>
+          <a:xfrm>
+            <a:off x="8226326" y="5855196"/>
+            <a:ext cx="2775049" cy="619720"/>
+          </a:xfrm>
+          <a:prstGeom prst="rect">
+            <a:avLst/>
+          </a:prstGeom>
+          <a:noFill/>
+        </p:spPr>
+        <p:txBody>
+          <a:bodyPr wrap="square" lIns="0" rIns="0" tIns="0" bIns="0">
+            <a:spAutoFit/>
+          </a:bodyPr>
+          <a:lstStyle/>
+          <a:p>
+            <a:pPr algn="l"/>
+            <a:r>
+              <a:rPr sz="1050" b="0" i="0" u="none">
+                <a:solidFill>
+                  <a:srgbClr val="A1A1AA"/>
+                </a:solidFill>
+                <a:latin typeface="Inter"/>
+              </a:rPr>
+              <a:t>Structural hashes hit 60–80% within a generator after warmup. Decisions are cheap to reuse.</a:t>
+            </a:r>
+          </a:p>
+        </p:txBody>
+      </p:sp>
     </p:spTree>
   </p:cSld>
   <p:clrMapOvr>
@@ -3221,9 +4933,87 @@
         <p:nvPr/>
       </p:nvGrpSpPr>
       <p:grpSpPr/>
+      <p:sp>
+        <p:nvSpPr>
+          <p:cNvPr id="2" name="Rectangle 1"/>
+          <p:cNvSpPr/>
+          <p:nvPr/>
+        </p:nvSpPr>
+        <p:spPr>
+          <a:xfrm>
+            <a:off x="0" y="0"/>
+            <a:ext cx="12192000" cy="6858000"/>
+          </a:xfrm>
+          <a:prstGeom prst="rect">
+            <a:avLst/>
+          </a:prstGeom>
+          <a:solidFill>
+            <a:srgbClr val="0A0A0F"/>
+          </a:solidFill>
+          <a:ln>
+            <a:noFill/>
+          </a:ln>
+        </p:spPr>
+        <p:style>
+          <a:lnRef idx="1">
+            <a:schemeClr val="accent1"/>
+          </a:lnRef>
+          <a:fillRef idx="3">
+            <a:schemeClr val="accent1"/>
+          </a:fillRef>
+          <a:effectRef idx="2">
+            <a:schemeClr val="accent1"/>
+          </a:effectRef>
+          <a:fontRef idx="minor">
+            <a:schemeClr val="lt1"/>
+          </a:fontRef>
+        </p:style>
+        <p:txBody>
+          <a:bodyPr rtlCol="0" anchor="ctr"/>
+          <a:lstStyle/>
+          <a:p>
+            <a:pPr algn="ctr"/>
+          </a:p>
+        </p:txBody>
+      </p:sp>
+      <p:sp>
+        <p:nvSpPr>
+          <p:cNvPr id="3" name="TextBox 2"/>
+          <p:cNvSpPr txBox="1"/>
+          <p:nvPr/>
+        </p:nvSpPr>
+        <p:spPr>
+          <a:xfrm>
+            <a:off x="914400" y="914400"/>
+            <a:ext cx="10363200" cy="152400"/>
+          </a:xfrm>
+          <a:prstGeom prst="rect">
+            <a:avLst/>
+          </a:prstGeom>
+          <a:noFill/>
+        </p:spPr>
+        <p:txBody>
+          <a:bodyPr wrap="square" lIns="0" rIns="0" tIns="0" bIns="0">
+            <a:spAutoFit/>
+          </a:bodyPr>
+          <a:lstStyle/>
+          <a:p>
+            <a:pPr algn="l"/>
+            <a:r>
+              <a:rPr sz="975" b="1" i="0" u="none">
+                <a:solidFill>
+                  <a:srgbClr val="A78BFA"/>
+                </a:solidFill>
+                <a:latin typeface="Inter"/>
+              </a:rPr>
+              <a:t>The pipeline</a:t>
+            </a:r>
+          </a:p>
+        </p:txBody>
+      </p:sp>
       <p:pic>
         <p:nvPicPr>
-          <p:cNvPr id="2" name="Picture 1" descr="image.png"/>
+          <p:cNvPr id="4" name="Picture 3" descr="image.png"/>
           <p:cNvPicPr>
             <a:picLocks noChangeAspect="1"/>
           </p:cNvPicPr>
@@ -3237,14 +5027,1076 @@
         </p:blipFill>
         <p:spPr>
           <a:xfrm>
-            <a:off x="0" y="0"/>
-            <a:ext cx="12192000" cy="6858000"/>
+            <a:off x="914400" y="1295400"/>
+            <a:ext cx="8763000" cy="479971"/>
           </a:xfrm>
           <a:prstGeom prst="rect">
             <a:avLst/>
           </a:prstGeom>
         </p:spPr>
       </p:pic>
+      <p:sp>
+        <p:nvSpPr>
+          <p:cNvPr id="5" name="Rounded Rectangle 4"/>
+          <p:cNvSpPr/>
+          <p:nvPr/>
+        </p:nvSpPr>
+        <p:spPr>
+          <a:xfrm>
+            <a:off x="914400" y="2384971"/>
+            <a:ext cx="1889671" cy="1928812"/>
+          </a:xfrm>
+          <a:prstGeom prst="roundRect">
+            <a:avLst/>
+          </a:prstGeom>
+          <a:solidFill>
+            <a:srgbClr val="FFFFFF"/>
+          </a:solidFill>
+          <a:ln w="9525">
+            <a:solidFill>
+              <a:srgbClr val="FFFFFF"/>
+            </a:solidFill>
+          </a:ln>
+        </p:spPr>
+        <p:style>
+          <a:lnRef idx="1">
+            <a:schemeClr val="accent1"/>
+          </a:lnRef>
+          <a:fillRef idx="3">
+            <a:schemeClr val="accent1"/>
+          </a:fillRef>
+          <a:effectRef idx="2">
+            <a:schemeClr val="accent1"/>
+          </a:effectRef>
+          <a:fontRef idx="minor">
+            <a:schemeClr val="lt1"/>
+          </a:fontRef>
+        </p:style>
+        <p:txBody>
+          <a:bodyPr rtlCol="0" anchor="ctr"/>
+          <a:lstStyle/>
+          <a:p>
+            <a:pPr algn="ctr"/>
+          </a:p>
+        </p:txBody>
+      </p:sp>
+      <p:sp>
+        <p:nvSpPr>
+          <p:cNvPr id="6" name="TextBox 5"/>
+          <p:cNvSpPr txBox="1"/>
+          <p:nvPr/>
+        </p:nvSpPr>
+        <p:spPr>
+          <a:xfrm>
+            <a:off x="1114425" y="2623096"/>
+            <a:ext cx="335161" cy="219075"/>
+          </a:xfrm>
+          <a:prstGeom prst="rect">
+            <a:avLst/>
+          </a:prstGeom>
+          <a:solidFill>
+            <a:srgbClr val="A78BFA"/>
+          </a:solidFill>
+        </p:spPr>
+        <p:txBody>
+          <a:bodyPr wrap="square" lIns="0" rIns="0" tIns="0" bIns="0">
+            <a:spAutoFit/>
+          </a:bodyPr>
+          <a:lstStyle/>
+          <a:p>
+            <a:pPr algn="l"/>
+            <a:r>
+              <a:rPr sz="900" b="1" i="0" u="none">
+                <a:solidFill>
+                  <a:srgbClr val="0A0A0F"/>
+                </a:solidFill>
+                <a:latin typeface="Inter"/>
+              </a:rPr>
+              <a:t>01</a:t>
+            </a:r>
+          </a:p>
+        </p:txBody>
+      </p:sp>
+      <p:sp>
+        <p:nvSpPr>
+          <p:cNvPr id="7" name="TextBox 6"/>
+          <p:cNvSpPr txBox="1"/>
+          <p:nvPr/>
+        </p:nvSpPr>
+        <p:spPr>
+          <a:xfrm>
+            <a:off x="1114425" y="2975521"/>
+            <a:ext cx="1489621" cy="200025"/>
+          </a:xfrm>
+          <a:prstGeom prst="rect">
+            <a:avLst/>
+          </a:prstGeom>
+          <a:noFill/>
+        </p:spPr>
+        <p:txBody>
+          <a:bodyPr wrap="square" lIns="0" rIns="0" tIns="0" bIns="0">
+            <a:spAutoFit/>
+          </a:bodyPr>
+          <a:lstStyle/>
+          <a:p>
+            <a:pPr algn="l"/>
+            <a:r>
+              <a:rPr sz="1350" b="1" i="0" u="none">
+                <a:solidFill>
+                  <a:srgbClr val="F5F5F7"/>
+                </a:solidFill>
+                <a:latin typeface="Inter"/>
+              </a:rPr>
+              <a:t>Render</a:t>
+            </a:r>
+          </a:p>
+        </p:txBody>
+      </p:sp>
+      <p:sp>
+        <p:nvSpPr>
+          <p:cNvPr id="8" name="TextBox 7"/>
+          <p:cNvSpPr txBox="1"/>
+          <p:nvPr/>
+        </p:nvSpPr>
+        <p:spPr>
+          <a:xfrm>
+            <a:off x="1114425" y="3251746"/>
+            <a:ext cx="1489621" cy="557212"/>
+          </a:xfrm>
+          <a:prstGeom prst="rect">
+            <a:avLst/>
+          </a:prstGeom>
+          <a:noFill/>
+        </p:spPr>
+        <p:txBody>
+          <a:bodyPr wrap="square" lIns="0" rIns="0" tIns="0" bIns="0">
+            <a:spAutoFit/>
+          </a:bodyPr>
+          <a:lstStyle/>
+          <a:p>
+            <a:pPr algn="l"/>
+            <a:r>
+              <a:rPr sz="975" b="0" i="0" u="none">
+                <a:solidFill>
+                  <a:srgbClr val="A1A1AA"/>
+                </a:solidFill>
+                <a:latin typeface="Inter"/>
+              </a:rPr>
+              <a:t>Headless Chromium with animation freeze, font preload, two-rAF wait.</a:t>
+            </a:r>
+          </a:p>
+        </p:txBody>
+      </p:sp>
+      <p:sp>
+        <p:nvSpPr>
+          <p:cNvPr id="9" name="TextBox 8"/>
+          <p:cNvSpPr txBox="1"/>
+          <p:nvPr/>
+        </p:nvSpPr>
+        <p:spPr>
+          <a:xfrm>
+            <a:off x="1114425" y="3942308"/>
+            <a:ext cx="1489621" cy="133350"/>
+          </a:xfrm>
+          <a:prstGeom prst="rect">
+            <a:avLst/>
+          </a:prstGeom>
+          <a:noFill/>
+        </p:spPr>
+        <p:txBody>
+          <a:bodyPr wrap="square" lIns="0" rIns="0" tIns="0" bIns="0">
+            <a:spAutoFit/>
+          </a:bodyPr>
+          <a:lstStyle/>
+          <a:p>
+            <a:pPr algn="l"/>
+            <a:r>
+              <a:rPr sz="825" b="1" i="0" u="none">
+                <a:solidFill>
+                  <a:srgbClr val="52525B"/>
+                </a:solidFill>
+                <a:latin typeface="Inter"/>
+              </a:rPr>
+              <a:t>PLAYWRIGHT</a:t>
+            </a:r>
+          </a:p>
+        </p:txBody>
+      </p:sp>
+      <p:sp>
+        <p:nvSpPr>
+          <p:cNvPr id="10" name="Rounded Rectangle 9"/>
+          <p:cNvSpPr/>
+          <p:nvPr/>
+        </p:nvSpPr>
+        <p:spPr>
+          <a:xfrm>
+            <a:off x="3032671" y="2384971"/>
+            <a:ext cx="1889820" cy="2114550"/>
+          </a:xfrm>
+          <a:prstGeom prst="roundRect">
+            <a:avLst/>
+          </a:prstGeom>
+          <a:solidFill>
+            <a:srgbClr val="FFFFFF"/>
+          </a:solidFill>
+          <a:ln w="9525">
+            <a:solidFill>
+              <a:srgbClr val="FFFFFF"/>
+            </a:solidFill>
+          </a:ln>
+        </p:spPr>
+        <p:style>
+          <a:lnRef idx="1">
+            <a:schemeClr val="accent1"/>
+          </a:lnRef>
+          <a:fillRef idx="3">
+            <a:schemeClr val="accent1"/>
+          </a:fillRef>
+          <a:effectRef idx="2">
+            <a:schemeClr val="accent1"/>
+          </a:effectRef>
+          <a:fontRef idx="minor">
+            <a:schemeClr val="lt1"/>
+          </a:fontRef>
+        </p:style>
+        <p:txBody>
+          <a:bodyPr rtlCol="0" anchor="ctr"/>
+          <a:lstStyle/>
+          <a:p>
+            <a:pPr algn="ctr"/>
+          </a:p>
+        </p:txBody>
+      </p:sp>
+      <p:sp>
+        <p:nvSpPr>
+          <p:cNvPr id="11" name="TextBox 10"/>
+          <p:cNvSpPr txBox="1"/>
+          <p:nvPr/>
+        </p:nvSpPr>
+        <p:spPr>
+          <a:xfrm>
+            <a:off x="3232696" y="2623096"/>
+            <a:ext cx="357932" cy="219075"/>
+          </a:xfrm>
+          <a:prstGeom prst="rect">
+            <a:avLst/>
+          </a:prstGeom>
+          <a:solidFill>
+            <a:srgbClr val="C084FC"/>
+          </a:solidFill>
+        </p:spPr>
+        <p:txBody>
+          <a:bodyPr wrap="square" lIns="0" rIns="0" tIns="0" bIns="0">
+            <a:spAutoFit/>
+          </a:bodyPr>
+          <a:lstStyle/>
+          <a:p>
+            <a:pPr algn="l"/>
+            <a:r>
+              <a:rPr sz="900" b="1" i="0" u="none">
+                <a:solidFill>
+                  <a:srgbClr val="0A0A0F"/>
+                </a:solidFill>
+                <a:latin typeface="Inter"/>
+              </a:rPr>
+              <a:t>02</a:t>
+            </a:r>
+          </a:p>
+        </p:txBody>
+      </p:sp>
+      <p:sp>
+        <p:nvSpPr>
+          <p:cNvPr id="12" name="TextBox 11"/>
+          <p:cNvSpPr txBox="1"/>
+          <p:nvPr/>
+        </p:nvSpPr>
+        <p:spPr>
+          <a:xfrm>
+            <a:off x="3232696" y="2975521"/>
+            <a:ext cx="1489770" cy="200025"/>
+          </a:xfrm>
+          <a:prstGeom prst="rect">
+            <a:avLst/>
+          </a:prstGeom>
+          <a:noFill/>
+        </p:spPr>
+        <p:txBody>
+          <a:bodyPr wrap="square" lIns="0" rIns="0" tIns="0" bIns="0">
+            <a:spAutoFit/>
+          </a:bodyPr>
+          <a:lstStyle/>
+          <a:p>
+            <a:pPr algn="l"/>
+            <a:r>
+              <a:rPr sz="1350" b="1" i="0" u="none">
+                <a:solidFill>
+                  <a:srgbClr val="F5F5F7"/>
+                </a:solidFill>
+                <a:latin typeface="Inter"/>
+              </a:rPr>
+              <a:t>Cluster</a:t>
+            </a:r>
+          </a:p>
+        </p:txBody>
+      </p:sp>
+      <p:sp>
+        <p:nvSpPr>
+          <p:cNvPr id="13" name="TextBox 12"/>
+          <p:cNvSpPr txBox="1"/>
+          <p:nvPr/>
+        </p:nvSpPr>
+        <p:spPr>
+          <a:xfrm>
+            <a:off x="3232696" y="3251746"/>
+            <a:ext cx="1489770" cy="742950"/>
+          </a:xfrm>
+          <a:prstGeom prst="rect">
+            <a:avLst/>
+          </a:prstGeom>
+          <a:noFill/>
+        </p:spPr>
+        <p:txBody>
+          <a:bodyPr wrap="square" lIns="0" rIns="0" tIns="0" bIns="0">
+            <a:spAutoFit/>
+          </a:bodyPr>
+          <a:lstStyle/>
+          <a:p>
+            <a:pPr algn="l"/>
+            <a:r>
+              <a:rPr sz="975" b="0" i="0" u="none">
+                <a:solidFill>
+                  <a:srgbClr val="A1A1AA"/>
+                </a:solidFill>
+                <a:latin typeface="Inter"/>
+              </a:rPr>
+              <a:t>DOM elements grouped into atomic visual units by anchor + spatial overlap.</a:t>
+            </a:r>
+          </a:p>
+        </p:txBody>
+      </p:sp>
+      <p:sp>
+        <p:nvSpPr>
+          <p:cNvPr id="14" name="TextBox 13"/>
+          <p:cNvSpPr txBox="1"/>
+          <p:nvPr/>
+        </p:nvSpPr>
+        <p:spPr>
+          <a:xfrm>
+            <a:off x="3232696" y="4128046"/>
+            <a:ext cx="1489770" cy="133350"/>
+          </a:xfrm>
+          <a:prstGeom prst="rect">
+            <a:avLst/>
+          </a:prstGeom>
+          <a:noFill/>
+        </p:spPr>
+        <p:txBody>
+          <a:bodyPr wrap="square" lIns="0" rIns="0" tIns="0" bIns="0">
+            <a:spAutoFit/>
+          </a:bodyPr>
+          <a:lstStyle/>
+          <a:p>
+            <a:pPr algn="l"/>
+            <a:r>
+              <a:rPr sz="825" b="1" i="0" u="none">
+                <a:solidFill>
+                  <a:srgbClr val="52525B"/>
+                </a:solidFill>
+                <a:latin typeface="Inter"/>
+              </a:rPr>
+              <a:t>~10–50 UNITS / SLIDE</a:t>
+            </a:r>
+          </a:p>
+        </p:txBody>
+      </p:sp>
+      <p:sp>
+        <p:nvSpPr>
+          <p:cNvPr id="15" name="Rounded Rectangle 14"/>
+          <p:cNvSpPr/>
+          <p:nvPr/>
+        </p:nvSpPr>
+        <p:spPr>
+          <a:xfrm>
+            <a:off x="5151090" y="2384971"/>
+            <a:ext cx="1889671" cy="1928812"/>
+          </a:xfrm>
+          <a:prstGeom prst="roundRect">
+            <a:avLst/>
+          </a:prstGeom>
+          <a:solidFill>
+            <a:srgbClr val="FFFFFF"/>
+          </a:solidFill>
+          <a:ln w="9525">
+            <a:solidFill>
+              <a:srgbClr val="FFFFFF"/>
+            </a:solidFill>
+          </a:ln>
+        </p:spPr>
+        <p:style>
+          <a:lnRef idx="1">
+            <a:schemeClr val="accent1"/>
+          </a:lnRef>
+          <a:fillRef idx="3">
+            <a:schemeClr val="accent1"/>
+          </a:fillRef>
+          <a:effectRef idx="2">
+            <a:schemeClr val="accent1"/>
+          </a:effectRef>
+          <a:fontRef idx="minor">
+            <a:schemeClr val="lt1"/>
+          </a:fontRef>
+        </p:style>
+        <p:txBody>
+          <a:bodyPr rtlCol="0" anchor="ctr"/>
+          <a:lstStyle/>
+          <a:p>
+            <a:pPr algn="ctr"/>
+          </a:p>
+        </p:txBody>
+      </p:sp>
+      <p:sp>
+        <p:nvSpPr>
+          <p:cNvPr id="16" name="TextBox 15"/>
+          <p:cNvSpPr txBox="1"/>
+          <p:nvPr/>
+        </p:nvSpPr>
+        <p:spPr>
+          <a:xfrm>
+            <a:off x="5351115" y="2623096"/>
+            <a:ext cx="359718" cy="219075"/>
+          </a:xfrm>
+          <a:prstGeom prst="rect">
+            <a:avLst/>
+          </a:prstGeom>
+          <a:solidFill>
+            <a:srgbClr val="F472B6"/>
+          </a:solidFill>
+        </p:spPr>
+        <p:txBody>
+          <a:bodyPr wrap="square" lIns="0" rIns="0" tIns="0" bIns="0">
+            <a:spAutoFit/>
+          </a:bodyPr>
+          <a:lstStyle/>
+          <a:p>
+            <a:pPr algn="l"/>
+            <a:r>
+              <a:rPr sz="900" b="1" i="0" u="none">
+                <a:solidFill>
+                  <a:srgbClr val="0A0A0F"/>
+                </a:solidFill>
+                <a:latin typeface="Inter"/>
+              </a:rPr>
+              <a:t>03</a:t>
+            </a:r>
+          </a:p>
+        </p:txBody>
+      </p:sp>
+      <p:sp>
+        <p:nvSpPr>
+          <p:cNvPr id="17" name="TextBox 16"/>
+          <p:cNvSpPr txBox="1"/>
+          <p:nvPr/>
+        </p:nvSpPr>
+        <p:spPr>
+          <a:xfrm>
+            <a:off x="5351115" y="2975521"/>
+            <a:ext cx="1489621" cy="200025"/>
+          </a:xfrm>
+          <a:prstGeom prst="rect">
+            <a:avLst/>
+          </a:prstGeom>
+          <a:noFill/>
+        </p:spPr>
+        <p:txBody>
+          <a:bodyPr wrap="square" lIns="0" rIns="0" tIns="0" bIns="0">
+            <a:spAutoFit/>
+          </a:bodyPr>
+          <a:lstStyle/>
+          <a:p>
+            <a:pPr algn="l"/>
+            <a:r>
+              <a:rPr sz="1350" b="1" i="0" u="none">
+                <a:solidFill>
+                  <a:srgbClr val="F5F5F7"/>
+                </a:solidFill>
+                <a:latin typeface="Inter"/>
+              </a:rPr>
+              <a:t>Classify</a:t>
+            </a:r>
+          </a:p>
+        </p:txBody>
+      </p:sp>
+      <p:sp>
+        <p:nvSpPr>
+          <p:cNvPr id="18" name="TextBox 17"/>
+          <p:cNvSpPr txBox="1"/>
+          <p:nvPr/>
+        </p:nvSpPr>
+        <p:spPr>
+          <a:xfrm>
+            <a:off x="5351115" y="3251746"/>
+            <a:ext cx="1489621" cy="557212"/>
+          </a:xfrm>
+          <a:prstGeom prst="rect">
+            <a:avLst/>
+          </a:prstGeom>
+          <a:noFill/>
+        </p:spPr>
+        <p:txBody>
+          <a:bodyPr wrap="square" lIns="0" rIns="0" tIns="0" bIns="0">
+            <a:spAutoFit/>
+          </a:bodyPr>
+          <a:lstStyle/>
+          <a:p>
+            <a:pPr algn="l"/>
+            <a:r>
+              <a:rPr sz="975" b="0" i="0" u="none">
+                <a:solidFill>
+                  <a:srgbClr val="A1A1AA"/>
+                </a:solidFill>
+                <a:latin typeface="Inter"/>
+              </a:rPr>
+              <a:t>Tier 1 rules → tier 2 heuristics → tier 3 LLM, batched per slide.</a:t>
+            </a:r>
+          </a:p>
+        </p:txBody>
+      </p:sp>
+      <p:sp>
+        <p:nvSpPr>
+          <p:cNvPr id="19" name="TextBox 18"/>
+          <p:cNvSpPr txBox="1"/>
+          <p:nvPr/>
+        </p:nvSpPr>
+        <p:spPr>
+          <a:xfrm>
+            <a:off x="5351115" y="3942308"/>
+            <a:ext cx="1489621" cy="133350"/>
+          </a:xfrm>
+          <a:prstGeom prst="rect">
+            <a:avLst/>
+          </a:prstGeom>
+          <a:noFill/>
+        </p:spPr>
+        <p:txBody>
+          <a:bodyPr wrap="square" lIns="0" rIns="0" tIns="0" bIns="0">
+            <a:spAutoFit/>
+          </a:bodyPr>
+          <a:lstStyle/>
+          <a:p>
+            <a:pPr algn="l"/>
+            <a:r>
+              <a:rPr sz="825" b="1" i="0" u="none">
+                <a:solidFill>
+                  <a:srgbClr val="52525B"/>
+                </a:solidFill>
+                <a:latin typeface="Inter"/>
+              </a:rPr>
+              <a:t>3 TIERS</a:t>
+            </a:r>
+          </a:p>
+        </p:txBody>
+      </p:sp>
+      <p:sp>
+        <p:nvSpPr>
+          <p:cNvPr id="20" name="Rounded Rectangle 19"/>
+          <p:cNvSpPr/>
+          <p:nvPr/>
+        </p:nvSpPr>
+        <p:spPr>
+          <a:xfrm>
+            <a:off x="7269361" y="2384971"/>
+            <a:ext cx="1889820" cy="2114550"/>
+          </a:xfrm>
+          <a:prstGeom prst="roundRect">
+            <a:avLst/>
+          </a:prstGeom>
+          <a:solidFill>
+            <a:srgbClr val="FFFFFF"/>
+          </a:solidFill>
+          <a:ln w="9525">
+            <a:solidFill>
+              <a:srgbClr val="FFFFFF"/>
+            </a:solidFill>
+          </a:ln>
+        </p:spPr>
+        <p:style>
+          <a:lnRef idx="1">
+            <a:schemeClr val="accent1"/>
+          </a:lnRef>
+          <a:fillRef idx="3">
+            <a:schemeClr val="accent1"/>
+          </a:fillRef>
+          <a:effectRef idx="2">
+            <a:schemeClr val="accent1"/>
+          </a:effectRef>
+          <a:fontRef idx="minor">
+            <a:schemeClr val="lt1"/>
+          </a:fontRef>
+        </p:style>
+        <p:txBody>
+          <a:bodyPr rtlCol="0" anchor="ctr"/>
+          <a:lstStyle/>
+          <a:p>
+            <a:pPr algn="ctr"/>
+          </a:p>
+        </p:txBody>
+      </p:sp>
+      <p:sp>
+        <p:nvSpPr>
+          <p:cNvPr id="21" name="TextBox 20"/>
+          <p:cNvSpPr txBox="1"/>
+          <p:nvPr/>
+        </p:nvSpPr>
+        <p:spPr>
+          <a:xfrm>
+            <a:off x="7469386" y="2623096"/>
+            <a:ext cx="363289" cy="219075"/>
+          </a:xfrm>
+          <a:prstGeom prst="rect">
+            <a:avLst/>
+          </a:prstGeom>
+          <a:solidFill>
+            <a:srgbClr val="FB923C"/>
+          </a:solidFill>
+        </p:spPr>
+        <p:txBody>
+          <a:bodyPr wrap="square" lIns="0" rIns="0" tIns="0" bIns="0">
+            <a:spAutoFit/>
+          </a:bodyPr>
+          <a:lstStyle/>
+          <a:p>
+            <a:pPr algn="l"/>
+            <a:r>
+              <a:rPr sz="900" b="1" i="0" u="none">
+                <a:solidFill>
+                  <a:srgbClr val="0A0A0F"/>
+                </a:solidFill>
+                <a:latin typeface="Inter"/>
+              </a:rPr>
+              <a:t>04</a:t>
+            </a:r>
+          </a:p>
+        </p:txBody>
+      </p:sp>
+      <p:sp>
+        <p:nvSpPr>
+          <p:cNvPr id="22" name="TextBox 21"/>
+          <p:cNvSpPr txBox="1"/>
+          <p:nvPr/>
+        </p:nvSpPr>
+        <p:spPr>
+          <a:xfrm>
+            <a:off x="7469386" y="2975521"/>
+            <a:ext cx="1489770" cy="200025"/>
+          </a:xfrm>
+          <a:prstGeom prst="rect">
+            <a:avLst/>
+          </a:prstGeom>
+          <a:noFill/>
+        </p:spPr>
+        <p:txBody>
+          <a:bodyPr wrap="square" lIns="0" rIns="0" tIns="0" bIns="0">
+            <a:spAutoFit/>
+          </a:bodyPr>
+          <a:lstStyle/>
+          <a:p>
+            <a:pPr algn="l"/>
+            <a:r>
+              <a:rPr sz="1350" b="1" i="0" u="none">
+                <a:solidFill>
+                  <a:srgbClr val="F5F5F7"/>
+                </a:solidFill>
+                <a:latin typeface="Inter"/>
+              </a:rPr>
+              <a:t>Emit</a:t>
+            </a:r>
+          </a:p>
+        </p:txBody>
+      </p:sp>
+      <p:sp>
+        <p:nvSpPr>
+          <p:cNvPr id="23" name="TextBox 22"/>
+          <p:cNvSpPr txBox="1"/>
+          <p:nvPr/>
+        </p:nvSpPr>
+        <p:spPr>
+          <a:xfrm>
+            <a:off x="7469386" y="3251746"/>
+            <a:ext cx="1489770" cy="742950"/>
+          </a:xfrm>
+          <a:prstGeom prst="rect">
+            <a:avLst/>
+          </a:prstGeom>
+          <a:noFill/>
+        </p:spPr>
+        <p:txBody>
+          <a:bodyPr wrap="square" lIns="0" rIns="0" tIns="0" bIns="0">
+            <a:spAutoFit/>
+          </a:bodyPr>
+          <a:lstStyle/>
+          <a:p>
+            <a:pPr algn="l"/>
+            <a:r>
+              <a:rPr sz="975" b="0" i="0" u="none">
+                <a:solidFill>
+                  <a:srgbClr val="A1A1AA"/>
+                </a:solidFill>
+                <a:latin typeface="Inter"/>
+              </a:rPr>
+              <a:t>python-pptx writes native text, shapes, bullets, pictures with EMU precision.</a:t>
+            </a:r>
+          </a:p>
+        </p:txBody>
+      </p:sp>
+      <p:sp>
+        <p:nvSpPr>
+          <p:cNvPr id="24" name="TextBox 23"/>
+          <p:cNvSpPr txBox="1"/>
+          <p:nvPr/>
+        </p:nvSpPr>
+        <p:spPr>
+          <a:xfrm>
+            <a:off x="7469386" y="4128046"/>
+            <a:ext cx="1489770" cy="133350"/>
+          </a:xfrm>
+          <a:prstGeom prst="rect">
+            <a:avLst/>
+          </a:prstGeom>
+          <a:noFill/>
+        </p:spPr>
+        <p:txBody>
+          <a:bodyPr wrap="square" lIns="0" rIns="0" tIns="0" bIns="0">
+            <a:spAutoFit/>
+          </a:bodyPr>
+          <a:lstStyle/>
+          <a:p>
+            <a:pPr algn="l"/>
+            <a:r>
+              <a:rPr sz="825" b="1" i="0" u="none">
+                <a:solidFill>
+                  <a:srgbClr val="52525B"/>
+                </a:solidFill>
+                <a:latin typeface="Inter"/>
+              </a:rPr>
+              <a:t>OOXML</a:t>
+            </a:r>
+          </a:p>
+        </p:txBody>
+      </p:sp>
+      <p:sp>
+        <p:nvSpPr>
+          <p:cNvPr id="25" name="Rounded Rectangle 24"/>
+          <p:cNvSpPr/>
+          <p:nvPr/>
+        </p:nvSpPr>
+        <p:spPr>
+          <a:xfrm>
+            <a:off x="9387780" y="2384971"/>
+            <a:ext cx="1889671" cy="2114550"/>
+          </a:xfrm>
+          <a:prstGeom prst="roundRect">
+            <a:avLst/>
+          </a:prstGeom>
+          <a:solidFill>
+            <a:srgbClr val="FFFFFF"/>
+          </a:solidFill>
+          <a:ln w="9525">
+            <a:solidFill>
+              <a:srgbClr val="FFFFFF"/>
+            </a:solidFill>
+          </a:ln>
+        </p:spPr>
+        <p:style>
+          <a:lnRef idx="1">
+            <a:schemeClr val="accent1"/>
+          </a:lnRef>
+          <a:fillRef idx="3">
+            <a:schemeClr val="accent1"/>
+          </a:fillRef>
+          <a:effectRef idx="2">
+            <a:schemeClr val="accent1"/>
+          </a:effectRef>
+          <a:fontRef idx="minor">
+            <a:schemeClr val="lt1"/>
+          </a:fontRef>
+        </p:style>
+        <p:txBody>
+          <a:bodyPr rtlCol="0" anchor="ctr"/>
+          <a:lstStyle/>
+          <a:p>
+            <a:pPr algn="ctr"/>
+          </a:p>
+        </p:txBody>
+      </p:sp>
+      <p:sp>
+        <p:nvSpPr>
+          <p:cNvPr id="26" name="TextBox 25"/>
+          <p:cNvSpPr txBox="1"/>
+          <p:nvPr/>
+        </p:nvSpPr>
+        <p:spPr>
+          <a:xfrm>
+            <a:off x="9587805" y="2623096"/>
+            <a:ext cx="358973" cy="219075"/>
+          </a:xfrm>
+          <a:prstGeom prst="rect">
+            <a:avLst/>
+          </a:prstGeom>
+          <a:solidFill>
+            <a:srgbClr val="FACC15"/>
+          </a:solidFill>
+        </p:spPr>
+        <p:txBody>
+          <a:bodyPr wrap="square" lIns="0" rIns="0" tIns="0" bIns="0">
+            <a:spAutoFit/>
+          </a:bodyPr>
+          <a:lstStyle/>
+          <a:p>
+            <a:pPr algn="l"/>
+            <a:r>
+              <a:rPr sz="900" b="1" i="0" u="none">
+                <a:solidFill>
+                  <a:srgbClr val="0A0A0F"/>
+                </a:solidFill>
+                <a:latin typeface="Inter"/>
+              </a:rPr>
+              <a:t>05</a:t>
+            </a:r>
+          </a:p>
+        </p:txBody>
+      </p:sp>
+      <p:sp>
+        <p:nvSpPr>
+          <p:cNvPr id="27" name="TextBox 26"/>
+          <p:cNvSpPr txBox="1"/>
+          <p:nvPr/>
+        </p:nvSpPr>
+        <p:spPr>
+          <a:xfrm>
+            <a:off x="9587805" y="2975521"/>
+            <a:ext cx="1489621" cy="200025"/>
+          </a:xfrm>
+          <a:prstGeom prst="rect">
+            <a:avLst/>
+          </a:prstGeom>
+          <a:noFill/>
+        </p:spPr>
+        <p:txBody>
+          <a:bodyPr wrap="square" lIns="0" rIns="0" tIns="0" bIns="0">
+            <a:spAutoFit/>
+          </a:bodyPr>
+          <a:lstStyle/>
+          <a:p>
+            <a:pPr algn="l"/>
+            <a:r>
+              <a:rPr sz="1350" b="1" i="0" u="none">
+                <a:solidFill>
+                  <a:srgbClr val="F5F5F7"/>
+                </a:solidFill>
+                <a:latin typeface="Inter"/>
+              </a:rPr>
+              <a:t>Validate</a:t>
+            </a:r>
+          </a:p>
+        </p:txBody>
+      </p:sp>
+      <p:sp>
+        <p:nvSpPr>
+          <p:cNvPr id="28" name="TextBox 27"/>
+          <p:cNvSpPr txBox="1"/>
+          <p:nvPr/>
+        </p:nvSpPr>
+        <p:spPr>
+          <a:xfrm>
+            <a:off x="9587805" y="3251746"/>
+            <a:ext cx="1489621" cy="742950"/>
+          </a:xfrm>
+          <a:prstGeom prst="rect">
+            <a:avLst/>
+          </a:prstGeom>
+          <a:noFill/>
+        </p:spPr>
+        <p:txBody>
+          <a:bodyPr wrap="square" lIns="0" rIns="0" tIns="0" bIns="0">
+            <a:spAutoFit/>
+          </a:bodyPr>
+          <a:lstStyle/>
+          <a:p>
+            <a:pPr algn="l"/>
+            <a:r>
+              <a:rPr sz="975" b="0" i="0" u="none">
+                <a:solidFill>
+                  <a:srgbClr val="A1A1AA"/>
+                </a:solidFill>
+                <a:latin typeface="Inter"/>
+              </a:rPr>
+              <a:t>LibreOffice re-renders. SSIM + OCR oracle. Auto-correct failing regions.</a:t>
+            </a:r>
+          </a:p>
+        </p:txBody>
+      </p:sp>
+      <p:sp>
+        <p:nvSpPr>
+          <p:cNvPr id="29" name="TextBox 28"/>
+          <p:cNvSpPr txBox="1"/>
+          <p:nvPr/>
+        </p:nvSpPr>
+        <p:spPr>
+          <a:xfrm>
+            <a:off x="9587805" y="4128046"/>
+            <a:ext cx="1489621" cy="133350"/>
+          </a:xfrm>
+          <a:prstGeom prst="rect">
+            <a:avLst/>
+          </a:prstGeom>
+          <a:noFill/>
+        </p:spPr>
+        <p:txBody>
+          <a:bodyPr wrap="square" lIns="0" rIns="0" tIns="0" bIns="0">
+            <a:spAutoFit/>
+          </a:bodyPr>
+          <a:lstStyle/>
+          <a:p>
+            <a:pPr algn="l"/>
+            <a:r>
+              <a:rPr sz="825" b="1" i="0" u="none">
+                <a:solidFill>
+                  <a:srgbClr val="52525B"/>
+                </a:solidFill>
+                <a:latin typeface="Inter"/>
+              </a:rPr>
+              <a:t>SSIM ≥ 0.95</a:t>
+            </a:r>
+          </a:p>
+        </p:txBody>
+      </p:sp>
+      <p:sp>
+        <p:nvSpPr>
+          <p:cNvPr id="30" name="Rounded Rectangle 29"/>
+          <p:cNvSpPr/>
+          <p:nvPr/>
+        </p:nvSpPr>
+        <p:spPr>
+          <a:gradFill flip="none" rotWithShape="1">
+            <a:gsLst>
+              <a:gs pos="0">
+                <a:srgbClr val="6366F1">
+                  <a:alpha val="12000"/>
+                </a:srgbClr>
+              </a:gs>
+              <a:gs pos="100000">
+                <a:srgbClr val="EC4899">
+                  <a:alpha val="8000"/>
+                </a:srgbClr>
+              </a:gs>
+            </a:gsLst>
+            <a:lin ang="2700000" scaled="0"/>
+          </a:gradFill>
+          <a:xfrm>
+            <a:off x="914400" y="5109121"/>
+            <a:ext cx="10363200" cy="1041797"/>
+          </a:xfrm>
+          <a:prstGeom prst="roundRect">
+            <a:avLst/>
+          </a:prstGeom>
+          <a:ln w="9525">
+            <a:solidFill>
+              <a:srgbClr val="FFFFFF"/>
+            </a:solidFill>
+          </a:ln>
+        </p:spPr>
+        <p:style>
+          <a:lnRef idx="1">
+            <a:schemeClr val="accent1"/>
+          </a:lnRef>
+          <a:fillRef idx="3">
+            <a:schemeClr val="accent1"/>
+          </a:fillRef>
+          <a:effectRef idx="2">
+            <a:schemeClr val="accent1"/>
+          </a:effectRef>
+          <a:fontRef idx="minor">
+            <a:schemeClr val="lt1"/>
+          </a:fontRef>
+        </p:style>
+        <p:txBody>
+          <a:bodyPr rtlCol="0" anchor="ctr"/>
+          <a:lstStyle/>
+          <a:p>
+            <a:pPr algn="ctr"/>
+          </a:p>
+        </p:txBody>
+      </p:sp>
+      <p:sp>
+        <p:nvSpPr>
+          <p:cNvPr id="31" name="TextBox 30"/>
+          <p:cNvSpPr txBox="1"/>
+          <p:nvPr/>
+        </p:nvSpPr>
+        <p:spPr>
+          <a:xfrm>
+            <a:off x="1304925" y="5530007"/>
+            <a:ext cx="3103066" cy="200025"/>
+          </a:xfrm>
+          <a:prstGeom prst="rect">
+            <a:avLst/>
+          </a:prstGeom>
+          <a:noFill/>
+        </p:spPr>
+        <p:txBody>
+          <a:bodyPr wrap="square" lIns="0" rIns="0" tIns="0" bIns="0">
+            <a:spAutoFit/>
+          </a:bodyPr>
+          <a:lstStyle/>
+          <a:p>
+            <a:pPr algn="l"/>
+            <a:r>
+              <a:rPr sz="1350" b="1" i="0" u="none">
+                <a:solidFill>
+                  <a:srgbClr val="F5F5F7"/>
+                </a:solidFill>
+                <a:latin typeface="Inter"/>
+              </a:rPr>
+              <a:t>Total budget · 25 s for a 10-slide deck</a:t>
+            </a:r>
+          </a:p>
+        </p:txBody>
+      </p:sp>
+      <p:sp>
+        <p:nvSpPr>
+          <p:cNvPr id="32" name="TextBox 31"/>
+          <p:cNvSpPr txBox="1"/>
+          <p:nvPr/>
+        </p:nvSpPr>
+        <p:spPr>
+          <a:xfrm>
+            <a:off x="5743575" y="5423446"/>
+            <a:ext cx="5143500" cy="413147"/>
+          </a:xfrm>
+          <a:prstGeom prst="rect">
+            <a:avLst/>
+          </a:prstGeom>
+          <a:noFill/>
+        </p:spPr>
+        <p:txBody>
+          <a:bodyPr wrap="square" lIns="0" rIns="0" tIns="0" bIns="0">
+            <a:spAutoFit/>
+          </a:bodyPr>
+          <a:lstStyle/>
+          <a:p>
+            <a:pPr algn="l"/>
+            <a:r>
+              <a:rPr sz="1050" b="0" i="0" u="none">
+                <a:solidFill>
+                  <a:srgbClr val="A1A1AA"/>
+                </a:solidFill>
+                <a:latin typeface="Inter"/>
+              </a:rPr>
+              <a:t>Bottleneck is render parallelism (Chart.js initialization). Tier 3 LLM is batched once per slide; cost ≤ $0.10/deck at default settings.</a:t>
+            </a:r>
+          </a:p>
+        </p:txBody>
+      </p:sp>
     </p:spTree>
   </p:cSld>
   <p:clrMapOvr>
@@ -3263,20 +6115,12 @@
         <p:nvPr/>
       </p:nvGrpSpPr>
       <p:grpSpPr/>
-      <p:pic>
-        <p:nvPicPr>
-          <p:cNvPr id="2" name="Picture 1" descr="image.png"/>
-          <p:cNvPicPr>
-            <a:picLocks noChangeAspect="1"/>
-          </p:cNvPicPr>
-          <p:nvPr/>
-        </p:nvPicPr>
-        <p:blipFill>
-          <a:blip r:embed="rId2"/>
-          <a:stretch>
-            <a:fillRect/>
-          </a:stretch>
-        </p:blipFill>
+      <p:sp>
+        <p:nvSpPr>
+          <p:cNvPr id="2" name="Rectangle 1"/>
+          <p:cNvSpPr/>
+          <p:nvPr/>
+        </p:nvSpPr>
         <p:spPr>
           <a:xfrm>
             <a:off x="0" y="0"/>
@@ -3285,8 +6129,980 @@
           <a:prstGeom prst="rect">
             <a:avLst/>
           </a:prstGeom>
-        </p:spPr>
-      </p:pic>
+          <a:solidFill>
+            <a:srgbClr val="0A0A0F"/>
+          </a:solidFill>
+          <a:ln>
+            <a:noFill/>
+          </a:ln>
+        </p:spPr>
+        <p:style>
+          <a:lnRef idx="1">
+            <a:schemeClr val="accent1"/>
+          </a:lnRef>
+          <a:fillRef idx="3">
+            <a:schemeClr val="accent1"/>
+          </a:fillRef>
+          <a:effectRef idx="2">
+            <a:schemeClr val="accent1"/>
+          </a:effectRef>
+          <a:fontRef idx="minor">
+            <a:schemeClr val="lt1"/>
+          </a:fontRef>
+        </p:style>
+        <p:txBody>
+          <a:bodyPr rtlCol="0" anchor="ctr"/>
+          <a:lstStyle/>
+          <a:p>
+            <a:pPr algn="ctr"/>
+          </a:p>
+        </p:txBody>
+      </p:sp>
+      <p:sp>
+        <p:nvSpPr>
+          <p:cNvPr id="3" name="TextBox 2"/>
+          <p:cNvSpPr txBox="1"/>
+          <p:nvPr/>
+        </p:nvSpPr>
+        <p:spPr>
+          <a:xfrm>
+            <a:off x="914400" y="762000"/>
+            <a:ext cx="10363200" cy="152400"/>
+          </a:xfrm>
+          <a:prstGeom prst="rect">
+            <a:avLst/>
+          </a:prstGeom>
+          <a:noFill/>
+        </p:spPr>
+        <p:txBody>
+          <a:bodyPr wrap="square" lIns="0" rIns="0" tIns="0" bIns="0">
+            <a:spAutoFit/>
+          </a:bodyPr>
+          <a:lstStyle/>
+          <a:p>
+            <a:pPr algn="l"/>
+            <a:r>
+              <a:rPr sz="975" b="1" i="0" u="none">
+                <a:solidFill>
+                  <a:srgbClr val="A78BFA"/>
+                </a:solidFill>
+                <a:latin typeface="Inter"/>
+              </a:rPr>
+              <a:t>Before · After</a:t>
+            </a:r>
+          </a:p>
+        </p:txBody>
+      </p:sp>
+      <p:sp>
+        <p:nvSpPr>
+          <p:cNvPr id="4" name="TextBox 3"/>
+          <p:cNvSpPr txBox="1"/>
+          <p:nvPr/>
+        </p:nvSpPr>
+        <p:spPr>
+          <a:xfrm>
+            <a:off x="914400" y="1085850"/>
+            <a:ext cx="8763000" cy="959941"/>
+          </a:xfrm>
+          <a:prstGeom prst="rect">
+            <a:avLst/>
+          </a:prstGeom>
+          <a:noFill/>
+        </p:spPr>
+        <p:txBody>
+          <a:bodyPr wrap="square" lIns="0" rIns="0" tIns="0" bIns="0">
+            <a:spAutoFit/>
+          </a:bodyPr>
+          <a:lstStyle/>
+          <a:p>
+            <a:pPr algn="l"/>
+            <a:r>
+              <a:rPr sz="3600" b="1" i="0" u="none">
+                <a:solidFill>
+                  <a:srgbClr val="F5F5F7"/>
+                </a:solidFill>
+                <a:latin typeface="Inter"/>
+              </a:rPr>
+              <a:t>Same browser render. Two very different decks.</a:t>
+            </a:r>
+          </a:p>
+        </p:txBody>
+      </p:sp>
+      <p:sp>
+        <p:nvSpPr>
+          <p:cNvPr id="5" name="Rounded Rectangle 4"/>
+          <p:cNvSpPr/>
+          <p:nvPr/>
+        </p:nvSpPr>
+        <p:spPr>
+          <a:xfrm>
+            <a:off x="914400" y="2502991"/>
+            <a:ext cx="5029200" cy="3843338"/>
+          </a:xfrm>
+          <a:prstGeom prst="roundRect">
+            <a:avLst/>
+          </a:prstGeom>
+          <a:solidFill>
+            <a:srgbClr val="3F3F46"/>
+          </a:solidFill>
+          <a:ln w="9525">
+            <a:solidFill>
+              <a:srgbClr val="FFFFFF"/>
+            </a:solidFill>
+          </a:ln>
+        </p:spPr>
+        <p:style>
+          <a:lnRef idx="1">
+            <a:schemeClr val="accent1"/>
+          </a:lnRef>
+          <a:fillRef idx="3">
+            <a:schemeClr val="accent1"/>
+          </a:fillRef>
+          <a:effectRef idx="2">
+            <a:schemeClr val="accent1"/>
+          </a:effectRef>
+          <a:fontRef idx="minor">
+            <a:schemeClr val="lt1"/>
+          </a:fontRef>
+        </p:style>
+        <p:txBody>
+          <a:bodyPr rtlCol="0" anchor="ctr"/>
+          <a:lstStyle/>
+          <a:p>
+            <a:pPr algn="ctr"/>
+          </a:p>
+        </p:txBody>
+      </p:sp>
+      <p:sp>
+        <p:nvSpPr>
+          <p:cNvPr id="6" name="TextBox 5"/>
+          <p:cNvSpPr txBox="1"/>
+          <p:nvPr/>
+        </p:nvSpPr>
+        <p:spPr>
+          <a:xfrm>
+            <a:off x="1266825" y="2855416"/>
+            <a:ext cx="4324350" cy="323850"/>
+          </a:xfrm>
+          <a:prstGeom prst="rect">
+            <a:avLst/>
+          </a:prstGeom>
+          <a:noFill/>
+        </p:spPr>
+        <p:txBody>
+          <a:bodyPr wrap="square" lIns="0" rIns="0" tIns="0" bIns="0">
+            <a:spAutoFit/>
+          </a:bodyPr>
+          <a:lstStyle/>
+          <a:p>
+            <a:pPr algn="l"/>
+            <a:r>
+              <a:rPr sz="2100" b="1" i="0" u="none">
+                <a:solidFill>
+                  <a:srgbClr val="A1A1AA"/>
+                </a:solidFill>
+                <a:latin typeface="Inter"/>
+              </a:rPr>
+              <a:t>Naive screenshot</a:t>
+            </a:r>
+            <a:r>
+              <a:rPr sz="900" b="1" i="0" u="none">
+                <a:solidFill>
+                  <a:srgbClr val="A1A1AA"/>
+                </a:solidFill>
+                <a:latin typeface="Inter"/>
+              </a:rPr>
+              <a:t>OLD WAY</a:t>
+            </a:r>
+          </a:p>
+        </p:txBody>
+      </p:sp>
+      <p:sp>
+        <p:nvSpPr>
+          <p:cNvPr id="7" name="TextBox 6"/>
+          <p:cNvSpPr txBox="1"/>
+          <p:nvPr/>
+        </p:nvSpPr>
+        <p:spPr>
+          <a:xfrm>
+            <a:off x="1266825" y="3503116"/>
+            <a:ext cx="209550" cy="209550"/>
+          </a:xfrm>
+          <a:prstGeom prst="rect">
+            <a:avLst/>
+          </a:prstGeom>
+          <a:noFill/>
+        </p:spPr>
+        <p:txBody>
+          <a:bodyPr wrap="square" lIns="0" rIns="0" tIns="0" bIns="0">
+            <a:spAutoFit/>
+          </a:bodyPr>
+          <a:lstStyle/>
+          <a:p>
+            <a:r>
+              <a:rPr sz="1050" b="1">
+                <a:solidFill>
+                  <a:srgbClr val="FCA5A5"/>
+                </a:solidFill>
+                <a:latin typeface="Inter"/>
+              </a:rPr>
+              <a:t>• ×</a:t>
+            </a:r>
+          </a:p>
+        </p:txBody>
+      </p:sp>
+      <p:sp>
+        <p:nvSpPr>
+          <p:cNvPr id="8" name="TextBox 7"/>
+          <p:cNvSpPr txBox="1"/>
+          <p:nvPr/>
+        </p:nvSpPr>
+        <p:spPr>
+          <a:xfrm>
+            <a:off x="1609725" y="3503116"/>
+            <a:ext cx="3343721" cy="207169"/>
+          </a:xfrm>
+          <a:prstGeom prst="rect">
+            <a:avLst/>
+          </a:prstGeom>
+          <a:noFill/>
+        </p:spPr>
+        <p:txBody>
+          <a:bodyPr wrap="square" lIns="0" rIns="0" tIns="0" bIns="0">
+            <a:spAutoFit/>
+          </a:bodyPr>
+          <a:lstStyle/>
+          <a:p>
+            <a:r>
+              <a:rPr sz="1125" b="0">
+                <a:solidFill>
+                  <a:srgbClr val="A1A1AA"/>
+                </a:solidFill>
+                <a:latin typeface="Inter"/>
+              </a:rPr>
+              <a:t>• Every slide is a 50 MB PNG embedded into PPTX.</a:t>
+            </a:r>
+          </a:p>
+        </p:txBody>
+      </p:sp>
+      <p:sp>
+        <p:nvSpPr>
+          <p:cNvPr id="9" name="TextBox 8"/>
+          <p:cNvSpPr txBox="1"/>
+          <p:nvPr/>
+        </p:nvSpPr>
+        <p:spPr>
+          <a:xfrm>
+            <a:off x="1266825" y="3988891"/>
+            <a:ext cx="209550" cy="209550"/>
+          </a:xfrm>
+          <a:prstGeom prst="rect">
+            <a:avLst/>
+          </a:prstGeom>
+          <a:noFill/>
+        </p:spPr>
+        <p:txBody>
+          <a:bodyPr wrap="square" lIns="0" rIns="0" tIns="0" bIns="0">
+            <a:spAutoFit/>
+          </a:bodyPr>
+          <a:lstStyle/>
+          <a:p>
+            <a:r>
+              <a:rPr sz="1050" b="1">
+                <a:solidFill>
+                  <a:srgbClr val="FCA5A5"/>
+                </a:solidFill>
+                <a:latin typeface="Inter"/>
+              </a:rPr>
+              <a:t>• ×</a:t>
+            </a:r>
+          </a:p>
+        </p:txBody>
+      </p:sp>
+      <p:sp>
+        <p:nvSpPr>
+          <p:cNvPr id="10" name="TextBox 9"/>
+          <p:cNvSpPr txBox="1"/>
+          <p:nvPr/>
+        </p:nvSpPr>
+        <p:spPr>
+          <a:xfrm>
+            <a:off x="1609725" y="3988891"/>
+            <a:ext cx="3033564" cy="207169"/>
+          </a:xfrm>
+          <a:prstGeom prst="rect">
+            <a:avLst/>
+          </a:prstGeom>
+          <a:noFill/>
+        </p:spPr>
+        <p:txBody>
+          <a:bodyPr wrap="square" lIns="0" rIns="0" tIns="0" bIns="0">
+            <a:spAutoFit/>
+          </a:bodyPr>
+          <a:lstStyle/>
+          <a:p>
+            <a:r>
+              <a:rPr sz="1125" b="0">
+                <a:solidFill>
+                  <a:srgbClr val="A1A1AA"/>
+                </a:solidFill>
+                <a:latin typeface="Inter"/>
+              </a:rPr>
+              <a:t>• No text is searchable, selectable, or editable.</a:t>
+            </a:r>
+          </a:p>
+        </p:txBody>
+      </p:sp>
+      <p:sp>
+        <p:nvSpPr>
+          <p:cNvPr id="11" name="TextBox 10"/>
+          <p:cNvSpPr txBox="1"/>
+          <p:nvPr/>
+        </p:nvSpPr>
+        <p:spPr>
+          <a:xfrm>
+            <a:off x="1266825" y="4474666"/>
+            <a:ext cx="209550" cy="209550"/>
+          </a:xfrm>
+          <a:prstGeom prst="rect">
+            <a:avLst/>
+          </a:prstGeom>
+          <a:noFill/>
+        </p:spPr>
+        <p:txBody>
+          <a:bodyPr wrap="square" lIns="0" rIns="0" tIns="0" bIns="0">
+            <a:spAutoFit/>
+          </a:bodyPr>
+          <a:lstStyle/>
+          <a:p>
+            <a:r>
+              <a:rPr sz="1050" b="1">
+                <a:solidFill>
+                  <a:srgbClr val="FCA5A5"/>
+                </a:solidFill>
+                <a:latin typeface="Inter"/>
+              </a:rPr>
+              <a:t>• ×</a:t>
+            </a:r>
+          </a:p>
+        </p:txBody>
+      </p:sp>
+      <p:sp>
+        <p:nvSpPr>
+          <p:cNvPr id="12" name="TextBox 11"/>
+          <p:cNvSpPr txBox="1"/>
+          <p:nvPr/>
+        </p:nvSpPr>
+        <p:spPr>
+          <a:xfrm>
+            <a:off x="1609725" y="4474666"/>
+            <a:ext cx="3067496" cy="207169"/>
+          </a:xfrm>
+          <a:prstGeom prst="rect">
+            <a:avLst/>
+          </a:prstGeom>
+          <a:noFill/>
+        </p:spPr>
+        <p:txBody>
+          <a:bodyPr wrap="square" lIns="0" rIns="0" tIns="0" bIns="0">
+            <a:spAutoFit/>
+          </a:bodyPr>
+          <a:lstStyle/>
+          <a:p>
+            <a:r>
+              <a:rPr sz="1125" b="0">
+                <a:solidFill>
+                  <a:srgbClr val="A1A1AA"/>
+                </a:solidFill>
+                <a:latin typeface="Inter"/>
+              </a:rPr>
+              <a:t>• Resizing the window degrades pixel-by-pixel.</a:t>
+            </a:r>
+          </a:p>
+        </p:txBody>
+      </p:sp>
+      <p:sp>
+        <p:nvSpPr>
+          <p:cNvPr id="13" name="TextBox 12"/>
+          <p:cNvSpPr txBox="1"/>
+          <p:nvPr/>
+        </p:nvSpPr>
+        <p:spPr>
+          <a:xfrm>
+            <a:off x="1266825" y="4960441"/>
+            <a:ext cx="209550" cy="209550"/>
+          </a:xfrm>
+          <a:prstGeom prst="rect">
+            <a:avLst/>
+          </a:prstGeom>
+          <a:noFill/>
+        </p:spPr>
+        <p:txBody>
+          <a:bodyPr wrap="square" lIns="0" rIns="0" tIns="0" bIns="0">
+            <a:spAutoFit/>
+          </a:bodyPr>
+          <a:lstStyle/>
+          <a:p>
+            <a:r>
+              <a:rPr sz="1050" b="1">
+                <a:solidFill>
+                  <a:srgbClr val="FCA5A5"/>
+                </a:solidFill>
+                <a:latin typeface="Inter"/>
+              </a:rPr>
+              <a:t>• ×</a:t>
+            </a:r>
+          </a:p>
+        </p:txBody>
+      </p:sp>
+      <p:sp>
+        <p:nvSpPr>
+          <p:cNvPr id="14" name="TextBox 13"/>
+          <p:cNvSpPr txBox="1"/>
+          <p:nvPr/>
+        </p:nvSpPr>
+        <p:spPr>
+          <a:xfrm>
+            <a:off x="1609725" y="4960441"/>
+            <a:ext cx="3401169" cy="207169"/>
+          </a:xfrm>
+          <a:prstGeom prst="rect">
+            <a:avLst/>
+          </a:prstGeom>
+          <a:noFill/>
+        </p:spPr>
+        <p:txBody>
+          <a:bodyPr wrap="square" lIns="0" rIns="0" tIns="0" bIns="0">
+            <a:spAutoFit/>
+          </a:bodyPr>
+          <a:lstStyle/>
+          <a:p>
+            <a:r>
+              <a:rPr sz="1125" b="0">
+                <a:solidFill>
+                  <a:srgbClr val="A1A1AA"/>
+                </a:solidFill>
+                <a:latin typeface="Inter"/>
+              </a:rPr>
+              <a:t>• Translation requires re-running the whole pipeline.</a:t>
+            </a:r>
+          </a:p>
+        </p:txBody>
+      </p:sp>
+      <p:sp>
+        <p:nvSpPr>
+          <p:cNvPr id="15" name="TextBox 14"/>
+          <p:cNvSpPr txBox="1"/>
+          <p:nvPr/>
+        </p:nvSpPr>
+        <p:spPr>
+          <a:xfrm>
+            <a:off x="1266825" y="5446216"/>
+            <a:ext cx="209550" cy="209550"/>
+          </a:xfrm>
+          <a:prstGeom prst="rect">
+            <a:avLst/>
+          </a:prstGeom>
+          <a:noFill/>
+        </p:spPr>
+        <p:txBody>
+          <a:bodyPr wrap="square" lIns="0" rIns="0" tIns="0" bIns="0">
+            <a:spAutoFit/>
+          </a:bodyPr>
+          <a:lstStyle/>
+          <a:p>
+            <a:r>
+              <a:rPr sz="1050" b="1">
+                <a:solidFill>
+                  <a:srgbClr val="FCA5A5"/>
+                </a:solidFill>
+                <a:latin typeface="Inter"/>
+              </a:rPr>
+              <a:t>• ×</a:t>
+            </a:r>
+          </a:p>
+        </p:txBody>
+      </p:sp>
+      <p:sp>
+        <p:nvSpPr>
+          <p:cNvPr id="16" name="TextBox 15"/>
+          <p:cNvSpPr txBox="1"/>
+          <p:nvPr/>
+        </p:nvSpPr>
+        <p:spPr>
+          <a:xfrm>
+            <a:off x="1609725" y="5446216"/>
+            <a:ext cx="3364557" cy="207169"/>
+          </a:xfrm>
+          <a:prstGeom prst="rect">
+            <a:avLst/>
+          </a:prstGeom>
+          <a:noFill/>
+        </p:spPr>
+        <p:txBody>
+          <a:bodyPr wrap="square" lIns="0" rIns="0" tIns="0" bIns="0">
+            <a:spAutoFit/>
+          </a:bodyPr>
+          <a:lstStyle/>
+          <a:p>
+            <a:r>
+              <a:rPr sz="1125" b="0">
+                <a:solidFill>
+                  <a:srgbClr val="A1A1AA"/>
+                </a:solidFill>
+                <a:latin typeface="Inter"/>
+              </a:rPr>
+              <a:t>• Brand colors locked into raster — no theme swap.</a:t>
+            </a:r>
+          </a:p>
+        </p:txBody>
+      </p:sp>
+      <p:sp>
+        <p:nvSpPr>
+          <p:cNvPr id="17" name="Rounded Rectangle 16"/>
+          <p:cNvSpPr/>
+          <p:nvPr/>
+        </p:nvSpPr>
+        <p:spPr>
+          <a:gradFill flip="none" rotWithShape="1">
+            <a:gsLst>
+              <a:gs pos="0">
+                <a:srgbClr val="6366F1">
+                  <a:alpha val="18000"/>
+                </a:srgbClr>
+              </a:gs>
+              <a:gs pos="100000">
+                <a:srgbClr val="EC4899">
+                  <a:alpha val="10000"/>
+                </a:srgbClr>
+              </a:gs>
+            </a:gsLst>
+            <a:lin ang="4200000" scaled="0"/>
+          </a:gradFill>
+          <a:xfrm>
+            <a:off x="6248400" y="2502991"/>
+            <a:ext cx="5029200" cy="3843338"/>
+          </a:xfrm>
+          <a:prstGeom prst="roundRect">
+            <a:avLst/>
+          </a:prstGeom>
+          <a:ln w="9525">
+            <a:solidFill>
+              <a:srgbClr val="A78BFA"/>
+            </a:solidFill>
+          </a:ln>
+        </p:spPr>
+        <p:style>
+          <a:lnRef idx="1">
+            <a:schemeClr val="accent1"/>
+          </a:lnRef>
+          <a:fillRef idx="3">
+            <a:schemeClr val="accent1"/>
+          </a:fillRef>
+          <a:effectRef idx="2">
+            <a:schemeClr val="accent1"/>
+          </a:effectRef>
+          <a:fontRef idx="minor">
+            <a:schemeClr val="lt1"/>
+          </a:fontRef>
+        </p:style>
+        <p:txBody>
+          <a:bodyPr rtlCol="0" anchor="ctr"/>
+          <a:lstStyle/>
+          <a:p>
+            <a:pPr algn="ctr"/>
+          </a:p>
+        </p:txBody>
+      </p:sp>
+      <p:sp>
+        <p:nvSpPr>
+          <p:cNvPr id="18" name="TextBox 17"/>
+          <p:cNvSpPr txBox="1"/>
+          <p:nvPr/>
+        </p:nvSpPr>
+        <p:spPr>
+          <a:xfrm>
+            <a:off x="6600825" y="2855416"/>
+            <a:ext cx="4324350" cy="323850"/>
+          </a:xfrm>
+          <a:prstGeom prst="rect">
+            <a:avLst/>
+          </a:prstGeom>
+          <a:noFill/>
+        </p:spPr>
+        <p:txBody>
+          <a:bodyPr wrap="square" lIns="0" rIns="0" tIns="0" bIns="0">
+            <a:spAutoFit/>
+          </a:bodyPr>
+          <a:lstStyle/>
+          <a:p>
+            <a:pPr algn="l"/>
+            <a:r>
+              <a:rPr sz="2100" b="1" i="0" u="none">
+                <a:solidFill>
+                  <a:srgbClr val="F5F5F7"/>
+                </a:solidFill>
+                <a:latin typeface="Inter"/>
+              </a:rPr>
+              <a:t>slidify</a:t>
+            </a:r>
+            <a:r>
+              <a:rPr sz="900" b="1" i="0" u="none">
+                <a:solidFill>
+                  <a:srgbClr val="0A0A0F"/>
+                </a:solidFill>
+                <a:latin typeface="Inter"/>
+              </a:rPr>
+              <a:t>NEW WAY</a:t>
+            </a:r>
+          </a:p>
+        </p:txBody>
+      </p:sp>
+      <p:sp>
+        <p:nvSpPr>
+          <p:cNvPr id="19" name="TextBox 18"/>
+          <p:cNvSpPr txBox="1"/>
+          <p:nvPr/>
+        </p:nvSpPr>
+        <p:spPr>
+          <a:xfrm>
+            <a:off x="6600825" y="3503116"/>
+            <a:ext cx="209550" cy="209550"/>
+          </a:xfrm>
+          <a:prstGeom prst="rect">
+            <a:avLst/>
+          </a:prstGeom>
+          <a:noFill/>
+        </p:spPr>
+        <p:txBody>
+          <a:bodyPr wrap="square" lIns="0" rIns="0" tIns="0" bIns="0">
+            <a:spAutoFit/>
+          </a:bodyPr>
+          <a:lstStyle/>
+          <a:p>
+            <a:r>
+              <a:rPr sz="1050" b="1">
+                <a:solidFill>
+                  <a:srgbClr val="86EFAC"/>
+                </a:solidFill>
+                <a:latin typeface="Inter"/>
+              </a:rPr>
+              <a:t>• ✓</a:t>
+            </a:r>
+          </a:p>
+        </p:txBody>
+      </p:sp>
+      <p:sp>
+        <p:nvSpPr>
+          <p:cNvPr id="20" name="TextBox 19"/>
+          <p:cNvSpPr txBox="1"/>
+          <p:nvPr/>
+        </p:nvSpPr>
+        <p:spPr>
+          <a:xfrm>
+            <a:off x="6943725" y="3503116"/>
+            <a:ext cx="3670548" cy="207169"/>
+          </a:xfrm>
+          <a:prstGeom prst="rect">
+            <a:avLst/>
+          </a:prstGeom>
+          <a:noFill/>
+        </p:spPr>
+        <p:txBody>
+          <a:bodyPr wrap="square" lIns="0" rIns="0" tIns="0" bIns="0">
+            <a:spAutoFit/>
+          </a:bodyPr>
+          <a:lstStyle/>
+          <a:p>
+            <a:pPr algn="l"/>
+            <a:r>
+              <a:rPr sz="1125" b="0" i="0" u="none">
+                <a:solidFill>
+                  <a:srgbClr val="E4E4E7"/>
+                </a:solidFill>
+                <a:latin typeface="Inter"/>
+              </a:rPr>
+              <a:t>Headlines, body copy, and bullets are real text frames.</a:t>
+            </a:r>
+          </a:p>
+        </p:txBody>
+      </p:sp>
+      <p:sp>
+        <p:nvSpPr>
+          <p:cNvPr id="21" name="TextBox 20"/>
+          <p:cNvSpPr txBox="1"/>
+          <p:nvPr/>
+        </p:nvSpPr>
+        <p:spPr>
+          <a:xfrm>
+            <a:off x="6600825" y="3988891"/>
+            <a:ext cx="209550" cy="209550"/>
+          </a:xfrm>
+          <a:prstGeom prst="rect">
+            <a:avLst/>
+          </a:prstGeom>
+          <a:noFill/>
+        </p:spPr>
+        <p:txBody>
+          <a:bodyPr wrap="square" lIns="0" rIns="0" tIns="0" bIns="0">
+            <a:spAutoFit/>
+          </a:bodyPr>
+          <a:lstStyle/>
+          <a:p>
+            <a:r>
+              <a:rPr sz="1050" b="1">
+                <a:solidFill>
+                  <a:srgbClr val="86EFAC"/>
+                </a:solidFill>
+                <a:latin typeface="Inter"/>
+              </a:rPr>
+              <a:t>• ✓</a:t>
+            </a:r>
+          </a:p>
+        </p:txBody>
+      </p:sp>
+      <p:sp>
+        <p:nvSpPr>
+          <p:cNvPr id="22" name="TextBox 21"/>
+          <p:cNvSpPr txBox="1"/>
+          <p:nvPr/>
+        </p:nvSpPr>
+        <p:spPr>
+          <a:xfrm>
+            <a:off x="6943725" y="3988891"/>
+            <a:ext cx="3365599" cy="207169"/>
+          </a:xfrm>
+          <a:prstGeom prst="rect">
+            <a:avLst/>
+          </a:prstGeom>
+          <a:noFill/>
+        </p:spPr>
+        <p:txBody>
+          <a:bodyPr wrap="square" lIns="0" rIns="0" tIns="0" bIns="0">
+            <a:spAutoFit/>
+          </a:bodyPr>
+          <a:lstStyle/>
+          <a:p>
+            <a:pPr algn="l"/>
+            <a:r>
+              <a:rPr sz="1125" b="0" i="0" u="none">
+                <a:solidFill>
+                  <a:srgbClr val="E4E4E7"/>
+                </a:solidFill>
+                <a:latin typeface="Inter"/>
+              </a:rPr>
+              <a:t>Cards and dividers are native rounded rectangles.</a:t>
+            </a:r>
+          </a:p>
+        </p:txBody>
+      </p:sp>
+      <p:sp>
+        <p:nvSpPr>
+          <p:cNvPr id="23" name="TextBox 22"/>
+          <p:cNvSpPr txBox="1"/>
+          <p:nvPr/>
+        </p:nvSpPr>
+        <p:spPr>
+          <a:xfrm>
+            <a:off x="6600825" y="4474666"/>
+            <a:ext cx="209550" cy="209550"/>
+          </a:xfrm>
+          <a:prstGeom prst="rect">
+            <a:avLst/>
+          </a:prstGeom>
+          <a:noFill/>
+        </p:spPr>
+        <p:txBody>
+          <a:bodyPr wrap="square" lIns="0" rIns="0" tIns="0" bIns="0">
+            <a:spAutoFit/>
+          </a:bodyPr>
+          <a:lstStyle/>
+          <a:p>
+            <a:r>
+              <a:rPr sz="1050" b="1">
+                <a:solidFill>
+                  <a:srgbClr val="86EFAC"/>
+                </a:solidFill>
+                <a:latin typeface="Inter"/>
+              </a:rPr>
+              <a:t>• ✓</a:t>
+            </a:r>
+          </a:p>
+        </p:txBody>
+      </p:sp>
+      <p:sp>
+        <p:nvSpPr>
+          <p:cNvPr id="24" name="TextBox 23"/>
+          <p:cNvSpPr txBox="1"/>
+          <p:nvPr/>
+        </p:nvSpPr>
+        <p:spPr>
+          <a:xfrm>
+            <a:off x="6943725" y="4474666"/>
+            <a:ext cx="3981450" cy="414338"/>
+          </a:xfrm>
+          <a:prstGeom prst="rect">
+            <a:avLst/>
+          </a:prstGeom>
+          <a:noFill/>
+        </p:spPr>
+        <p:txBody>
+          <a:bodyPr wrap="square" lIns="0" rIns="0" tIns="0" bIns="0">
+            <a:spAutoFit/>
+          </a:bodyPr>
+          <a:lstStyle/>
+          <a:p>
+            <a:pPr algn="l"/>
+            <a:r>
+              <a:rPr sz="1125" b="0" i="0" u="none">
+                <a:solidFill>
+                  <a:srgbClr val="E4E4E7"/>
+                </a:solidFill>
+                <a:latin typeface="Inter"/>
+              </a:rPr>
+              <a:t>Designers edit fonts, colors, alignment in PowerPoint directly.</a:t>
+            </a:r>
+          </a:p>
+        </p:txBody>
+      </p:sp>
+      <p:sp>
+        <p:nvSpPr>
+          <p:cNvPr id="25" name="TextBox 24"/>
+          <p:cNvSpPr txBox="1"/>
+          <p:nvPr/>
+        </p:nvSpPr>
+        <p:spPr>
+          <a:xfrm>
+            <a:off x="6600825" y="5165229"/>
+            <a:ext cx="209550" cy="209550"/>
+          </a:xfrm>
+          <a:prstGeom prst="rect">
+            <a:avLst/>
+          </a:prstGeom>
+          <a:noFill/>
+        </p:spPr>
+        <p:txBody>
+          <a:bodyPr wrap="square" lIns="0" rIns="0" tIns="0" bIns="0">
+            <a:spAutoFit/>
+          </a:bodyPr>
+          <a:lstStyle/>
+          <a:p>
+            <a:r>
+              <a:rPr sz="1050" b="1">
+                <a:solidFill>
+                  <a:srgbClr val="86EFAC"/>
+                </a:solidFill>
+                <a:latin typeface="Inter"/>
+              </a:rPr>
+              <a:t>• ✓</a:t>
+            </a:r>
+          </a:p>
+        </p:txBody>
+      </p:sp>
+      <p:sp>
+        <p:nvSpPr>
+          <p:cNvPr id="26" name="TextBox 25"/>
+          <p:cNvSpPr txBox="1"/>
+          <p:nvPr/>
+        </p:nvSpPr>
+        <p:spPr>
+          <a:xfrm>
+            <a:off x="6943725" y="5165229"/>
+            <a:ext cx="3478411" cy="207169"/>
+          </a:xfrm>
+          <a:prstGeom prst="rect">
+            <a:avLst/>
+          </a:prstGeom>
+          <a:noFill/>
+        </p:spPr>
+        <p:txBody>
+          <a:bodyPr wrap="square" lIns="0" rIns="0" tIns="0" bIns="0">
+            <a:spAutoFit/>
+          </a:bodyPr>
+          <a:lstStyle/>
+          <a:p>
+            <a:pPr algn="l"/>
+            <a:r>
+              <a:rPr sz="1125" b="0" i="0" u="none">
+                <a:solidFill>
+                  <a:srgbClr val="E4E4E7"/>
+                </a:solidFill>
+                <a:latin typeface="Inter"/>
+              </a:rPr>
+              <a:t>Only complex visuals (Chart.js, gradients) rasterize.</a:t>
+            </a:r>
+          </a:p>
+        </p:txBody>
+      </p:sp>
+      <p:sp>
+        <p:nvSpPr>
+          <p:cNvPr id="27" name="TextBox 26"/>
+          <p:cNvSpPr txBox="1"/>
+          <p:nvPr/>
+        </p:nvSpPr>
+        <p:spPr>
+          <a:xfrm>
+            <a:off x="6600825" y="5651004"/>
+            <a:ext cx="209550" cy="209550"/>
+          </a:xfrm>
+          <a:prstGeom prst="rect">
+            <a:avLst/>
+          </a:prstGeom>
+          <a:noFill/>
+        </p:spPr>
+        <p:txBody>
+          <a:bodyPr wrap="square" lIns="0" rIns="0" tIns="0" bIns="0">
+            <a:spAutoFit/>
+          </a:bodyPr>
+          <a:lstStyle/>
+          <a:p>
+            <a:r>
+              <a:rPr sz="1050" b="1">
+                <a:solidFill>
+                  <a:srgbClr val="86EFAC"/>
+                </a:solidFill>
+                <a:latin typeface="Inter"/>
+              </a:rPr>
+              <a:t>• ✓</a:t>
+            </a:r>
+          </a:p>
+        </p:txBody>
+      </p:sp>
+      <p:sp>
+        <p:nvSpPr>
+          <p:cNvPr id="28" name="TextBox 27"/>
+          <p:cNvSpPr txBox="1"/>
+          <p:nvPr/>
+        </p:nvSpPr>
+        <p:spPr>
+          <a:xfrm>
+            <a:off x="6943725" y="5651004"/>
+            <a:ext cx="3252341" cy="207169"/>
+          </a:xfrm>
+          <a:prstGeom prst="rect">
+            <a:avLst/>
+          </a:prstGeom>
+          <a:noFill/>
+        </p:spPr>
+        <p:txBody>
+          <a:bodyPr wrap="square" lIns="0" rIns="0" tIns="0" bIns="0">
+            <a:spAutoFit/>
+          </a:bodyPr>
+          <a:lstStyle/>
+          <a:p>
+            <a:pPr algn="l"/>
+            <a:r>
+              <a:rPr sz="1125" b="0" i="0" u="none">
+                <a:solidFill>
+                  <a:srgbClr val="E4E4E7"/>
+                </a:solidFill>
+                <a:latin typeface="Inter"/>
+              </a:rPr>
+              <a:t>Output is 4 MB instead of 50 MB. Email-friendly.</a:t>
+            </a:r>
+          </a:p>
+        </p:txBody>
+      </p:sp>
     </p:spTree>
   </p:cSld>
   <p:clrMapOvr>
@@ -3347,9 +7163,87 @@
         <p:nvPr/>
       </p:nvGrpSpPr>
       <p:grpSpPr/>
+      <p:sp>
+        <p:nvSpPr>
+          <p:cNvPr id="2" name="Rectangle 1"/>
+          <p:cNvSpPr/>
+          <p:nvPr/>
+        </p:nvSpPr>
+        <p:spPr>
+          <a:xfrm>
+            <a:off x="0" y="0"/>
+            <a:ext cx="12192000" cy="6858000"/>
+          </a:xfrm>
+          <a:prstGeom prst="rect">
+            <a:avLst/>
+          </a:prstGeom>
+          <a:solidFill>
+            <a:srgbClr val="0A0A0F"/>
+          </a:solidFill>
+          <a:ln>
+            <a:noFill/>
+          </a:ln>
+        </p:spPr>
+        <p:style>
+          <a:lnRef idx="1">
+            <a:schemeClr val="accent1"/>
+          </a:lnRef>
+          <a:fillRef idx="3">
+            <a:schemeClr val="accent1"/>
+          </a:fillRef>
+          <a:effectRef idx="2">
+            <a:schemeClr val="accent1"/>
+          </a:effectRef>
+          <a:fontRef idx="minor">
+            <a:schemeClr val="lt1"/>
+          </a:fontRef>
+        </p:style>
+        <p:txBody>
+          <a:bodyPr rtlCol="0" anchor="ctr"/>
+          <a:lstStyle/>
+          <a:p>
+            <a:pPr algn="ctr"/>
+          </a:p>
+        </p:txBody>
+      </p:sp>
+      <p:sp>
+        <p:nvSpPr>
+          <p:cNvPr id="3" name="TextBox 2"/>
+          <p:cNvSpPr txBox="1"/>
+          <p:nvPr/>
+        </p:nvSpPr>
+        <p:spPr>
+          <a:xfrm>
+            <a:off x="914400" y="609600"/>
+            <a:ext cx="10363200" cy="152400"/>
+          </a:xfrm>
+          <a:prstGeom prst="rect">
+            <a:avLst/>
+          </a:prstGeom>
+          <a:noFill/>
+        </p:spPr>
+        <p:txBody>
+          <a:bodyPr wrap="square" lIns="0" rIns="0" tIns="0" bIns="0">
+            <a:spAutoFit/>
+          </a:bodyPr>
+          <a:lstStyle/>
+          <a:p>
+            <a:pPr algn="l"/>
+            <a:r>
+              <a:rPr sz="975" b="1" i="0" u="none">
+                <a:solidFill>
+                  <a:srgbClr val="A78BFA"/>
+                </a:solidFill>
+                <a:latin typeface="Inter"/>
+              </a:rPr>
+              <a:t>Pricing</a:t>
+            </a:r>
+          </a:p>
+        </p:txBody>
+      </p:sp>
       <p:pic>
         <p:nvPicPr>
-          <p:cNvPr id="2" name="Picture 1" descr="image.png"/>
+          <p:cNvPr id="4" name="Picture 3" descr="image.png"/>
           <p:cNvPicPr>
             <a:picLocks noChangeAspect="1"/>
           </p:cNvPicPr>
@@ -3363,14 +7257,1547 @@
         </p:blipFill>
         <p:spPr>
           <a:xfrm>
-            <a:off x="0" y="0"/>
-            <a:ext cx="12192000" cy="6858000"/>
+            <a:off x="914400" y="895350"/>
+            <a:ext cx="10363200" cy="419993"/>
           </a:xfrm>
           <a:prstGeom prst="rect">
             <a:avLst/>
           </a:prstGeom>
         </p:spPr>
       </p:pic>
+      <p:sp>
+        <p:nvSpPr>
+          <p:cNvPr id="5" name="Rounded Rectangle 4"/>
+          <p:cNvSpPr/>
+          <p:nvPr/>
+        </p:nvSpPr>
+        <p:spPr>
+          <a:xfrm>
+            <a:off x="914400" y="1658243"/>
+            <a:ext cx="3327350" cy="4600575"/>
+          </a:xfrm>
+          <a:prstGeom prst="roundRect">
+            <a:avLst/>
+          </a:prstGeom>
+          <a:solidFill>
+            <a:srgbClr val="FFFFFF"/>
+          </a:solidFill>
+          <a:ln w="9525">
+            <a:solidFill>
+              <a:srgbClr val="FFFFFF"/>
+            </a:solidFill>
+          </a:ln>
+        </p:spPr>
+        <p:style>
+          <a:lnRef idx="1">
+            <a:schemeClr val="accent1"/>
+          </a:lnRef>
+          <a:fillRef idx="3">
+            <a:schemeClr val="accent1"/>
+          </a:fillRef>
+          <a:effectRef idx="2">
+            <a:schemeClr val="accent1"/>
+          </a:effectRef>
+          <a:fontRef idx="minor">
+            <a:schemeClr val="lt1"/>
+          </a:fontRef>
+        </p:style>
+        <p:txBody>
+          <a:bodyPr rtlCol="0" anchor="ctr"/>
+          <a:lstStyle/>
+          <a:p>
+            <a:pPr algn="ctr"/>
+          </a:p>
+        </p:txBody>
+      </p:sp>
+      <p:sp>
+        <p:nvSpPr>
+          <p:cNvPr id="6" name="TextBox 5"/>
+          <p:cNvSpPr txBox="1"/>
+          <p:nvPr/>
+        </p:nvSpPr>
+        <p:spPr>
+          <a:xfrm>
+            <a:off x="1190625" y="1972568"/>
+            <a:ext cx="2774900" cy="161925"/>
+          </a:xfrm>
+          <a:prstGeom prst="rect">
+            <a:avLst/>
+          </a:prstGeom>
+          <a:noFill/>
+        </p:spPr>
+        <p:txBody>
+          <a:bodyPr wrap="square" lIns="0" rIns="0" tIns="0" bIns="0">
+            <a:spAutoFit/>
+          </a:bodyPr>
+          <a:lstStyle/>
+          <a:p>
+            <a:pPr algn="l"/>
+            <a:r>
+              <a:rPr sz="1050" b="1" i="0" u="none">
+                <a:solidFill>
+                  <a:srgbClr val="A78BFA"/>
+                </a:solidFill>
+                <a:latin typeface="Inter"/>
+              </a:rPr>
+              <a:t>Starter</a:t>
+            </a:r>
+          </a:p>
+        </p:txBody>
+      </p:sp>
+      <p:sp>
+        <p:nvSpPr>
+          <p:cNvPr id="7" name="TextBox 6"/>
+          <p:cNvSpPr txBox="1"/>
+          <p:nvPr/>
+        </p:nvSpPr>
+        <p:spPr>
+          <a:xfrm>
+            <a:off x="1190625" y="2267843"/>
+            <a:ext cx="2774900" cy="533400"/>
+          </a:xfrm>
+          <a:prstGeom prst="rect">
+            <a:avLst/>
+          </a:prstGeom>
+          <a:noFill/>
+        </p:spPr>
+        <p:txBody>
+          <a:bodyPr wrap="square" lIns="0" rIns="0" tIns="0" bIns="0">
+            <a:spAutoFit/>
+          </a:bodyPr>
+          <a:lstStyle/>
+          <a:p>
+            <a:pPr algn="l"/>
+            <a:r>
+              <a:rPr sz="4200" b="1" i="0" u="none">
+                <a:solidFill>
+                  <a:srgbClr val="F5F5F7"/>
+                </a:solidFill>
+                <a:latin typeface="Inter"/>
+              </a:rPr>
+              <a:t>$0</a:t>
+            </a:r>
+            <a:r>
+              <a:rPr sz="1200" b="0" i="0" u="none">
+                <a:solidFill>
+                  <a:srgbClr val="A1A1AA"/>
+                </a:solidFill>
+                <a:latin typeface="Inter"/>
+              </a:rPr>
+              <a:t>/mo</a:t>
+            </a:r>
+          </a:p>
+        </p:txBody>
+      </p:sp>
+      <p:sp>
+        <p:nvSpPr>
+          <p:cNvPr id="8" name="TextBox 7"/>
+          <p:cNvSpPr txBox="1"/>
+          <p:nvPr/>
+        </p:nvSpPr>
+        <p:spPr>
+          <a:xfrm>
+            <a:off x="1190625" y="2934593"/>
+            <a:ext cx="2774900" cy="400050"/>
+          </a:xfrm>
+          <a:prstGeom prst="rect">
+            <a:avLst/>
+          </a:prstGeom>
+          <a:noFill/>
+        </p:spPr>
+        <p:txBody>
+          <a:bodyPr wrap="square" lIns="0" rIns="0" tIns="0" bIns="0">
+            <a:spAutoFit/>
+          </a:bodyPr>
+          <a:lstStyle/>
+          <a:p>
+            <a:pPr algn="l"/>
+            <a:r>
+              <a:rPr sz="1050" b="0" i="0" u="none">
+                <a:solidFill>
+                  <a:srgbClr val="A1A1AA"/>
+                </a:solidFill>
+                <a:latin typeface="Inter"/>
+              </a:rPr>
+              <a:t>For solo founders shipping their first deck. No credit card.</a:t>
+            </a:r>
+          </a:p>
+        </p:txBody>
+      </p:sp>
+      <p:sp>
+        <p:nvSpPr>
+          <p:cNvPr id="9" name="TextBox 8"/>
+          <p:cNvSpPr txBox="1"/>
+          <p:nvPr/>
+        </p:nvSpPr>
+        <p:spPr>
+          <a:xfrm>
+            <a:off x="1190625" y="3563243"/>
+            <a:ext cx="117723" cy="200025"/>
+          </a:xfrm>
+          <a:prstGeom prst="rect">
+            <a:avLst/>
+          </a:prstGeom>
+          <a:noFill/>
+        </p:spPr>
+        <p:txBody>
+          <a:bodyPr wrap="square" lIns="0" rIns="0" tIns="0" bIns="0">
+            <a:spAutoFit/>
+          </a:bodyPr>
+          <a:lstStyle/>
+          <a:p>
+            <a:r>
+              <a:rPr sz="1050" b="1">
+                <a:solidFill>
+                  <a:srgbClr val="86EFAC"/>
+                </a:solidFill>
+                <a:latin typeface="Inter"/>
+              </a:rPr>
+              <a:t>• ✓</a:t>
+            </a:r>
+          </a:p>
+        </p:txBody>
+      </p:sp>
+      <p:sp>
+        <p:nvSpPr>
+          <p:cNvPr id="10" name="TextBox 9"/>
+          <p:cNvSpPr txBox="1"/>
+          <p:nvPr/>
+        </p:nvSpPr>
+        <p:spPr>
+          <a:xfrm>
+            <a:off x="1403598" y="3563243"/>
+            <a:ext cx="1088678" cy="200025"/>
+          </a:xfrm>
+          <a:prstGeom prst="rect">
+            <a:avLst/>
+          </a:prstGeom>
+          <a:noFill/>
+        </p:spPr>
+        <p:txBody>
+          <a:bodyPr wrap="square" lIns="0" rIns="0" tIns="0" bIns="0">
+            <a:spAutoFit/>
+          </a:bodyPr>
+          <a:lstStyle/>
+          <a:p>
+            <a:pPr algn="l"/>
+            <a:r>
+              <a:rPr sz="1050" b="0" i="0" u="none">
+                <a:solidFill>
+                  <a:srgbClr val="F5F5F7"/>
+                </a:solidFill>
+                <a:latin typeface="Inter"/>
+              </a:rPr>
+              <a:t>50 slides / month</a:t>
+            </a:r>
+          </a:p>
+        </p:txBody>
+      </p:sp>
+      <p:sp>
+        <p:nvSpPr>
+          <p:cNvPr id="11" name="TextBox 10"/>
+          <p:cNvSpPr txBox="1"/>
+          <p:nvPr/>
+        </p:nvSpPr>
+        <p:spPr>
+          <a:xfrm>
+            <a:off x="1190625" y="3925193"/>
+            <a:ext cx="117723" cy="200025"/>
+          </a:xfrm>
+          <a:prstGeom prst="rect">
+            <a:avLst/>
+          </a:prstGeom>
+          <a:noFill/>
+        </p:spPr>
+        <p:txBody>
+          <a:bodyPr wrap="square" lIns="0" rIns="0" tIns="0" bIns="0">
+            <a:spAutoFit/>
+          </a:bodyPr>
+          <a:lstStyle/>
+          <a:p>
+            <a:r>
+              <a:rPr sz="1050" b="1">
+                <a:solidFill>
+                  <a:srgbClr val="86EFAC"/>
+                </a:solidFill>
+                <a:latin typeface="Inter"/>
+              </a:rPr>
+              <a:t>• ✓</a:t>
+            </a:r>
+          </a:p>
+        </p:txBody>
+      </p:sp>
+      <p:sp>
+        <p:nvSpPr>
+          <p:cNvPr id="12" name="TextBox 11"/>
+          <p:cNvSpPr txBox="1"/>
+          <p:nvPr/>
+        </p:nvSpPr>
+        <p:spPr>
+          <a:xfrm>
+            <a:off x="1403598" y="3925193"/>
+            <a:ext cx="1170682" cy="200025"/>
+          </a:xfrm>
+          <a:prstGeom prst="rect">
+            <a:avLst/>
+          </a:prstGeom>
+          <a:noFill/>
+        </p:spPr>
+        <p:txBody>
+          <a:bodyPr wrap="square" lIns="0" rIns="0" tIns="0" bIns="0">
+            <a:spAutoFit/>
+          </a:bodyPr>
+          <a:lstStyle/>
+          <a:p>
+            <a:pPr algn="l"/>
+            <a:r>
+              <a:rPr sz="1050" b="0" i="0" u="none">
+                <a:solidFill>
+                  <a:srgbClr val="F5F5F7"/>
+                </a:solidFill>
+                <a:latin typeface="Inter"/>
+              </a:rPr>
+              <a:t>Tier 1 + Tier 2 only</a:t>
+            </a:r>
+          </a:p>
+        </p:txBody>
+      </p:sp>
+      <p:sp>
+        <p:nvSpPr>
+          <p:cNvPr id="13" name="TextBox 12"/>
+          <p:cNvSpPr txBox="1"/>
+          <p:nvPr/>
+        </p:nvSpPr>
+        <p:spPr>
+          <a:xfrm>
+            <a:off x="1190625" y="4287143"/>
+            <a:ext cx="117723" cy="200025"/>
+          </a:xfrm>
+          <a:prstGeom prst="rect">
+            <a:avLst/>
+          </a:prstGeom>
+          <a:noFill/>
+        </p:spPr>
+        <p:txBody>
+          <a:bodyPr wrap="square" lIns="0" rIns="0" tIns="0" bIns="0">
+            <a:spAutoFit/>
+          </a:bodyPr>
+          <a:lstStyle/>
+          <a:p>
+            <a:r>
+              <a:rPr sz="1050" b="1">
+                <a:solidFill>
+                  <a:srgbClr val="86EFAC"/>
+                </a:solidFill>
+                <a:latin typeface="Inter"/>
+              </a:rPr>
+              <a:t>• ✓</a:t>
+            </a:r>
+          </a:p>
+        </p:txBody>
+      </p:sp>
+      <p:sp>
+        <p:nvSpPr>
+          <p:cNvPr id="14" name="TextBox 13"/>
+          <p:cNvSpPr txBox="1"/>
+          <p:nvPr/>
+        </p:nvSpPr>
+        <p:spPr>
+          <a:xfrm>
+            <a:off x="1403598" y="4287143"/>
+            <a:ext cx="1333202" cy="200025"/>
+          </a:xfrm>
+          <a:prstGeom prst="rect">
+            <a:avLst/>
+          </a:prstGeom>
+          <a:noFill/>
+        </p:spPr>
+        <p:txBody>
+          <a:bodyPr wrap="square" lIns="0" rIns="0" tIns="0" bIns="0">
+            <a:spAutoFit/>
+          </a:bodyPr>
+          <a:lstStyle/>
+          <a:p>
+            <a:pPr algn="l"/>
+            <a:r>
+              <a:rPr sz="1050" b="0" i="0" u="none">
+                <a:solidFill>
+                  <a:srgbClr val="F5F5F7"/>
+                </a:solidFill>
+                <a:latin typeface="Inter"/>
+              </a:rPr>
+              <a:t>SSIM oracle included</a:t>
+            </a:r>
+          </a:p>
+        </p:txBody>
+      </p:sp>
+      <p:sp>
+        <p:nvSpPr>
+          <p:cNvPr id="15" name="TextBox 14"/>
+          <p:cNvSpPr txBox="1"/>
+          <p:nvPr/>
+        </p:nvSpPr>
+        <p:spPr>
+          <a:xfrm>
+            <a:off x="1190625" y="4649093"/>
+            <a:ext cx="117723" cy="200025"/>
+          </a:xfrm>
+          <a:prstGeom prst="rect">
+            <a:avLst/>
+          </a:prstGeom>
+          <a:noFill/>
+        </p:spPr>
+        <p:txBody>
+          <a:bodyPr wrap="square" lIns="0" rIns="0" tIns="0" bIns="0">
+            <a:spAutoFit/>
+          </a:bodyPr>
+          <a:lstStyle/>
+          <a:p>
+            <a:r>
+              <a:rPr sz="1050" b="1">
+                <a:solidFill>
+                  <a:srgbClr val="86EFAC"/>
+                </a:solidFill>
+                <a:latin typeface="Inter"/>
+              </a:rPr>
+              <a:t>• ✓</a:t>
+            </a:r>
+          </a:p>
+        </p:txBody>
+      </p:sp>
+      <p:sp>
+        <p:nvSpPr>
+          <p:cNvPr id="16" name="TextBox 15"/>
+          <p:cNvSpPr txBox="1"/>
+          <p:nvPr/>
+        </p:nvSpPr>
+        <p:spPr>
+          <a:xfrm>
+            <a:off x="1403598" y="4649093"/>
+            <a:ext cx="1248073" cy="200025"/>
+          </a:xfrm>
+          <a:prstGeom prst="rect">
+            <a:avLst/>
+          </a:prstGeom>
+          <a:noFill/>
+        </p:spPr>
+        <p:txBody>
+          <a:bodyPr wrap="square" lIns="0" rIns="0" tIns="0" bIns="0">
+            <a:spAutoFit/>
+          </a:bodyPr>
+          <a:lstStyle/>
+          <a:p>
+            <a:pPr algn="l"/>
+            <a:r>
+              <a:rPr sz="1050" b="0" i="0" u="none">
+                <a:solidFill>
+                  <a:srgbClr val="F5F5F7"/>
+                </a:solidFill>
+                <a:latin typeface="Inter"/>
+              </a:rPr>
+              <a:t>Community support</a:t>
+            </a:r>
+          </a:p>
+        </p:txBody>
+      </p:sp>
+      <p:sp>
+        <p:nvSpPr>
+          <p:cNvPr id="17" name="TextBox 16"/>
+          <p:cNvSpPr txBox="1"/>
+          <p:nvPr/>
+        </p:nvSpPr>
+        <p:spPr>
+          <a:xfrm>
+            <a:off x="1190625" y="5496818"/>
+            <a:ext cx="2774900" cy="447675"/>
+          </a:xfrm>
+          <a:prstGeom prst="rect">
+            <a:avLst/>
+          </a:prstGeom>
+          <a:solidFill>
+            <a:srgbClr val="FFFFFF"/>
+          </a:solidFill>
+        </p:spPr>
+        <p:txBody>
+          <a:bodyPr wrap="square" lIns="0" rIns="0" tIns="0" bIns="0">
+            <a:spAutoFit/>
+          </a:bodyPr>
+          <a:lstStyle/>
+          <a:p>
+            <a:pPr algn="ctr"/>
+            <a:r>
+              <a:rPr sz="1050" b="1" i="0" u="none">
+                <a:solidFill>
+                  <a:srgbClr val="F5F5F7"/>
+                </a:solidFill>
+                <a:latin typeface="Inter"/>
+              </a:rPr>
+              <a:t>Start free</a:t>
+            </a:r>
+          </a:p>
+        </p:txBody>
+      </p:sp>
+      <p:sp>
+        <p:nvSpPr>
+          <p:cNvPr id="18" name="Rounded Rectangle 17"/>
+          <p:cNvSpPr/>
+          <p:nvPr/>
+        </p:nvSpPr>
+        <p:spPr>
+          <a:gradFill flip="none" rotWithShape="1">
+            <a:gsLst>
+              <a:gs pos="0">
+                <a:srgbClr val="6366F1">
+                  <a:alpha val="18000"/>
+                </a:srgbClr>
+              </a:gs>
+              <a:gs pos="100000">
+                <a:srgbClr val="EC4899">
+                  <a:alpha val="10000"/>
+                </a:srgbClr>
+              </a:gs>
+            </a:gsLst>
+            <a:lin ang="4200000" scaled="0"/>
+          </a:gradFill>
+          <a:xfrm>
+            <a:off x="4432250" y="1658243"/>
+            <a:ext cx="3327350" cy="4600575"/>
+          </a:xfrm>
+          <a:prstGeom prst="roundRect">
+            <a:avLst/>
+          </a:prstGeom>
+          <a:ln w="9525">
+            <a:solidFill>
+              <a:srgbClr val="A78BFA"/>
+            </a:solidFill>
+          </a:ln>
+        </p:spPr>
+        <p:style>
+          <a:lnRef idx="1">
+            <a:schemeClr val="accent1"/>
+          </a:lnRef>
+          <a:fillRef idx="3">
+            <a:schemeClr val="accent1"/>
+          </a:fillRef>
+          <a:effectRef idx="2">
+            <a:schemeClr val="accent1"/>
+          </a:effectRef>
+          <a:fontRef idx="minor">
+            <a:schemeClr val="lt1"/>
+          </a:fontRef>
+        </p:style>
+        <p:txBody>
+          <a:bodyPr rtlCol="0" anchor="ctr"/>
+          <a:lstStyle/>
+          <a:p>
+            <a:pPr algn="ctr"/>
+          </a:p>
+        </p:txBody>
+      </p:sp>
+      <p:sp>
+        <p:nvSpPr>
+          <p:cNvPr id="19" name="TextBox 18"/>
+          <p:cNvSpPr txBox="1"/>
+          <p:nvPr/>
+        </p:nvSpPr>
+        <p:spPr>
+          <a:gradFill flip="none" rotWithShape="1">
+            <a:gsLst>
+              <a:gs pos="0">
+                <a:srgbClr val="A78BFA"/>
+              </a:gs>
+              <a:gs pos="100000">
+                <a:srgbClr val="EC4899"/>
+              </a:gs>
+            </a:gsLst>
+            <a:lin ang="2700000" scaled="0"/>
+          </a:gradFill>
+          <a:xfrm>
+            <a:off x="5416004" y="1553468"/>
+            <a:ext cx="1359694" cy="257175"/>
+          </a:xfrm>
+          <a:prstGeom prst="rect">
+            <a:avLst/>
+          </a:prstGeom>
+        </p:spPr>
+        <p:txBody>
+          <a:bodyPr wrap="square" lIns="0" rIns="0" tIns="0" bIns="0">
+            <a:spAutoFit/>
+          </a:bodyPr>
+          <a:lstStyle/>
+          <a:p>
+            <a:pPr algn="l"/>
+            <a:r>
+              <a:rPr sz="900" b="1" i="0" u="none">
+                <a:solidFill>
+                  <a:srgbClr val="0A0A0F"/>
+                </a:solidFill>
+                <a:latin typeface="Inter"/>
+              </a:rPr>
+              <a:t>MOST POPULAR</a:t>
+            </a:r>
+          </a:p>
+        </p:txBody>
+      </p:sp>
+      <p:sp>
+        <p:nvSpPr>
+          <p:cNvPr id="20" name="TextBox 19"/>
+          <p:cNvSpPr txBox="1"/>
+          <p:nvPr/>
+        </p:nvSpPr>
+        <p:spPr>
+          <a:xfrm>
+            <a:off x="4708475" y="1972568"/>
+            <a:ext cx="2774900" cy="161925"/>
+          </a:xfrm>
+          <a:prstGeom prst="rect">
+            <a:avLst/>
+          </a:prstGeom>
+          <a:noFill/>
+        </p:spPr>
+        <p:txBody>
+          <a:bodyPr wrap="square" lIns="0" rIns="0" tIns="0" bIns="0">
+            <a:spAutoFit/>
+          </a:bodyPr>
+          <a:lstStyle/>
+          <a:p>
+            <a:pPr algn="l"/>
+            <a:r>
+              <a:rPr sz="1050" b="1" i="0" u="none">
+                <a:solidFill>
+                  <a:srgbClr val="A78BFA"/>
+                </a:solidFill>
+                <a:latin typeface="Inter"/>
+              </a:rPr>
+              <a:t>Studio</a:t>
+            </a:r>
+          </a:p>
+        </p:txBody>
+      </p:sp>
+      <p:sp>
+        <p:nvSpPr>
+          <p:cNvPr id="21" name="TextBox 20"/>
+          <p:cNvSpPr txBox="1"/>
+          <p:nvPr/>
+        </p:nvSpPr>
+        <p:spPr>
+          <a:xfrm>
+            <a:off x="4708475" y="2267843"/>
+            <a:ext cx="2774900" cy="533400"/>
+          </a:xfrm>
+          <a:prstGeom prst="rect">
+            <a:avLst/>
+          </a:prstGeom>
+          <a:noFill/>
+        </p:spPr>
+        <p:txBody>
+          <a:bodyPr wrap="square" lIns="0" rIns="0" tIns="0" bIns="0">
+            <a:spAutoFit/>
+          </a:bodyPr>
+          <a:lstStyle/>
+          <a:p>
+            <a:pPr algn="l"/>
+            <a:r>
+              <a:rPr sz="4200" b="1" i="0" u="none">
+                <a:solidFill>
+                  <a:srgbClr val="F5F5F7"/>
+                </a:solidFill>
+                <a:latin typeface="Inter"/>
+              </a:rPr>
+              <a:t>$29</a:t>
+            </a:r>
+            <a:r>
+              <a:rPr sz="1200" b="0" i="0" u="none">
+                <a:solidFill>
+                  <a:srgbClr val="A1A1AA"/>
+                </a:solidFill>
+                <a:latin typeface="Inter"/>
+              </a:rPr>
+              <a:t>/mo</a:t>
+            </a:r>
+          </a:p>
+        </p:txBody>
+      </p:sp>
+      <p:sp>
+        <p:nvSpPr>
+          <p:cNvPr id="22" name="TextBox 21"/>
+          <p:cNvSpPr txBox="1"/>
+          <p:nvPr/>
+        </p:nvSpPr>
+        <p:spPr>
+          <a:xfrm>
+            <a:off x="4708475" y="2934593"/>
+            <a:ext cx="2774900" cy="400050"/>
+          </a:xfrm>
+          <a:prstGeom prst="rect">
+            <a:avLst/>
+          </a:prstGeom>
+          <a:noFill/>
+        </p:spPr>
+        <p:txBody>
+          <a:bodyPr wrap="square" lIns="0" rIns="0" tIns="0" bIns="0">
+            <a:spAutoFit/>
+          </a:bodyPr>
+          <a:lstStyle/>
+          <a:p>
+            <a:pPr algn="l"/>
+            <a:r>
+              <a:rPr sz="1050" b="0" i="0" u="none">
+                <a:solidFill>
+                  <a:srgbClr val="A1A1AA"/>
+                </a:solidFill>
+                <a:latin typeface="Inter"/>
+              </a:rPr>
+              <a:t>For design teams converting decks every day. LLM credits included.</a:t>
+            </a:r>
+          </a:p>
+        </p:txBody>
+      </p:sp>
+      <p:sp>
+        <p:nvSpPr>
+          <p:cNvPr id="23" name="TextBox 22"/>
+          <p:cNvSpPr txBox="1"/>
+          <p:nvPr/>
+        </p:nvSpPr>
+        <p:spPr>
+          <a:xfrm>
+            <a:off x="4708475" y="3563243"/>
+            <a:ext cx="117723" cy="200025"/>
+          </a:xfrm>
+          <a:prstGeom prst="rect">
+            <a:avLst/>
+          </a:prstGeom>
+          <a:noFill/>
+        </p:spPr>
+        <p:txBody>
+          <a:bodyPr wrap="square" lIns="0" rIns="0" tIns="0" bIns="0">
+            <a:spAutoFit/>
+          </a:bodyPr>
+          <a:lstStyle/>
+          <a:p>
+            <a:r>
+              <a:rPr sz="1050" b="1">
+                <a:solidFill>
+                  <a:srgbClr val="86EFAC"/>
+                </a:solidFill>
+                <a:latin typeface="Inter"/>
+              </a:rPr>
+              <a:t>• ✓</a:t>
+            </a:r>
+          </a:p>
+        </p:txBody>
+      </p:sp>
+      <p:sp>
+        <p:nvSpPr>
+          <p:cNvPr id="24" name="TextBox 23"/>
+          <p:cNvSpPr txBox="1"/>
+          <p:nvPr/>
+        </p:nvSpPr>
+        <p:spPr>
+          <a:xfrm>
+            <a:off x="4921448" y="3563243"/>
+            <a:ext cx="1265039" cy="200025"/>
+          </a:xfrm>
+          <a:prstGeom prst="rect">
+            <a:avLst/>
+          </a:prstGeom>
+          <a:noFill/>
+        </p:spPr>
+        <p:txBody>
+          <a:bodyPr wrap="square" lIns="0" rIns="0" tIns="0" bIns="0">
+            <a:spAutoFit/>
+          </a:bodyPr>
+          <a:lstStyle/>
+          <a:p>
+            <a:pPr algn="l"/>
+            <a:r>
+              <a:rPr sz="1050" b="0" i="0" u="none">
+                <a:solidFill>
+                  <a:srgbClr val="F5F5F7"/>
+                </a:solidFill>
+                <a:latin typeface="Inter"/>
+              </a:rPr>
+              <a:t>1,000 slides / month</a:t>
+            </a:r>
+          </a:p>
+        </p:txBody>
+      </p:sp>
+      <p:sp>
+        <p:nvSpPr>
+          <p:cNvPr id="25" name="TextBox 24"/>
+          <p:cNvSpPr txBox="1"/>
+          <p:nvPr/>
+        </p:nvSpPr>
+        <p:spPr>
+          <a:xfrm>
+            <a:off x="4708475" y="3925193"/>
+            <a:ext cx="117723" cy="200025"/>
+          </a:xfrm>
+          <a:prstGeom prst="rect">
+            <a:avLst/>
+          </a:prstGeom>
+          <a:noFill/>
+        </p:spPr>
+        <p:txBody>
+          <a:bodyPr wrap="square" lIns="0" rIns="0" tIns="0" bIns="0">
+            <a:spAutoFit/>
+          </a:bodyPr>
+          <a:lstStyle/>
+          <a:p>
+            <a:r>
+              <a:rPr sz="1050" b="1">
+                <a:solidFill>
+                  <a:srgbClr val="86EFAC"/>
+                </a:solidFill>
+                <a:latin typeface="Inter"/>
+              </a:rPr>
+              <a:t>• ✓</a:t>
+            </a:r>
+          </a:p>
+        </p:txBody>
+      </p:sp>
+      <p:sp>
+        <p:nvSpPr>
+          <p:cNvPr id="26" name="TextBox 25"/>
+          <p:cNvSpPr txBox="1"/>
+          <p:nvPr/>
+        </p:nvSpPr>
+        <p:spPr>
+          <a:xfrm>
+            <a:off x="4921448" y="3925193"/>
+            <a:ext cx="1449884" cy="200025"/>
+          </a:xfrm>
+          <a:prstGeom prst="rect">
+            <a:avLst/>
+          </a:prstGeom>
+          <a:noFill/>
+        </p:spPr>
+        <p:txBody>
+          <a:bodyPr wrap="square" lIns="0" rIns="0" tIns="0" bIns="0">
+            <a:spAutoFit/>
+          </a:bodyPr>
+          <a:lstStyle/>
+          <a:p>
+            <a:pPr algn="l"/>
+            <a:r>
+              <a:rPr sz="1050" b="0" i="0" u="none">
+                <a:solidFill>
+                  <a:srgbClr val="F5F5F7"/>
+                </a:solidFill>
+                <a:latin typeface="Inter"/>
+              </a:rPr>
+              <a:t>Full three-tier classifier</a:t>
+            </a:r>
+          </a:p>
+        </p:txBody>
+      </p:sp>
+      <p:sp>
+        <p:nvSpPr>
+          <p:cNvPr id="27" name="TextBox 26"/>
+          <p:cNvSpPr txBox="1"/>
+          <p:nvPr/>
+        </p:nvSpPr>
+        <p:spPr>
+          <a:xfrm>
+            <a:off x="4708475" y="4287143"/>
+            <a:ext cx="117723" cy="200025"/>
+          </a:xfrm>
+          <a:prstGeom prst="rect">
+            <a:avLst/>
+          </a:prstGeom>
+          <a:noFill/>
+        </p:spPr>
+        <p:txBody>
+          <a:bodyPr wrap="square" lIns="0" rIns="0" tIns="0" bIns="0">
+            <a:spAutoFit/>
+          </a:bodyPr>
+          <a:lstStyle/>
+          <a:p>
+            <a:r>
+              <a:rPr sz="1050" b="1">
+                <a:solidFill>
+                  <a:srgbClr val="86EFAC"/>
+                </a:solidFill>
+                <a:latin typeface="Inter"/>
+              </a:rPr>
+              <a:t>• ✓</a:t>
+            </a:r>
+          </a:p>
+        </p:txBody>
+      </p:sp>
+      <p:sp>
+        <p:nvSpPr>
+          <p:cNvPr id="28" name="TextBox 27"/>
+          <p:cNvSpPr txBox="1"/>
+          <p:nvPr/>
+        </p:nvSpPr>
+        <p:spPr>
+          <a:xfrm>
+            <a:off x="4921448" y="4287143"/>
+            <a:ext cx="1693813" cy="200025"/>
+          </a:xfrm>
+          <a:prstGeom prst="rect">
+            <a:avLst/>
+          </a:prstGeom>
+          <a:noFill/>
+        </p:spPr>
+        <p:txBody>
+          <a:bodyPr wrap="square" lIns="0" rIns="0" tIns="0" bIns="0">
+            <a:spAutoFit/>
+          </a:bodyPr>
+          <a:lstStyle/>
+          <a:p>
+            <a:pPr algn="l"/>
+            <a:r>
+              <a:rPr sz="1050" b="0" i="0" u="none">
+                <a:solidFill>
+                  <a:srgbClr val="F5F5F7"/>
+                </a:solidFill>
+                <a:latin typeface="Inter"/>
+              </a:rPr>
+              <a:t>Gemini + Claude backends</a:t>
+            </a:r>
+          </a:p>
+        </p:txBody>
+      </p:sp>
+      <p:sp>
+        <p:nvSpPr>
+          <p:cNvPr id="29" name="TextBox 28"/>
+          <p:cNvSpPr txBox="1"/>
+          <p:nvPr/>
+        </p:nvSpPr>
+        <p:spPr>
+          <a:xfrm>
+            <a:off x="4708475" y="4649093"/>
+            <a:ext cx="117723" cy="200025"/>
+          </a:xfrm>
+          <a:prstGeom prst="rect">
+            <a:avLst/>
+          </a:prstGeom>
+          <a:noFill/>
+        </p:spPr>
+        <p:txBody>
+          <a:bodyPr wrap="square" lIns="0" rIns="0" tIns="0" bIns="0">
+            <a:spAutoFit/>
+          </a:bodyPr>
+          <a:lstStyle/>
+          <a:p>
+            <a:r>
+              <a:rPr sz="1050" b="1">
+                <a:solidFill>
+                  <a:srgbClr val="86EFAC"/>
+                </a:solidFill>
+                <a:latin typeface="Inter"/>
+              </a:rPr>
+              <a:t>• ✓</a:t>
+            </a:r>
+          </a:p>
+        </p:txBody>
+      </p:sp>
+      <p:sp>
+        <p:nvSpPr>
+          <p:cNvPr id="30" name="TextBox 29"/>
+          <p:cNvSpPr txBox="1"/>
+          <p:nvPr/>
+        </p:nvSpPr>
+        <p:spPr>
+          <a:xfrm>
+            <a:off x="4921448" y="4649093"/>
+            <a:ext cx="1593354" cy="200025"/>
+          </a:xfrm>
+          <a:prstGeom prst="rect">
+            <a:avLst/>
+          </a:prstGeom>
+          <a:noFill/>
+        </p:spPr>
+        <p:txBody>
+          <a:bodyPr wrap="square" lIns="0" rIns="0" tIns="0" bIns="0">
+            <a:spAutoFit/>
+          </a:bodyPr>
+          <a:lstStyle/>
+          <a:p>
+            <a:pPr algn="l"/>
+            <a:r>
+              <a:rPr sz="1050" b="0" i="0" u="none">
+                <a:solidFill>
+                  <a:srgbClr val="F5F5F7"/>
+                </a:solidFill>
+                <a:latin typeface="Inter"/>
+              </a:rPr>
+              <a:t>Diskcache + warm cache</a:t>
+            </a:r>
+          </a:p>
+        </p:txBody>
+      </p:sp>
+      <p:sp>
+        <p:nvSpPr>
+          <p:cNvPr id="31" name="TextBox 30"/>
+          <p:cNvSpPr txBox="1"/>
+          <p:nvPr/>
+        </p:nvSpPr>
+        <p:spPr>
+          <a:xfrm>
+            <a:off x="4708475" y="5011043"/>
+            <a:ext cx="117723" cy="200025"/>
+          </a:xfrm>
+          <a:prstGeom prst="rect">
+            <a:avLst/>
+          </a:prstGeom>
+          <a:noFill/>
+        </p:spPr>
+        <p:txBody>
+          <a:bodyPr wrap="square" lIns="0" rIns="0" tIns="0" bIns="0">
+            <a:spAutoFit/>
+          </a:bodyPr>
+          <a:lstStyle/>
+          <a:p>
+            <a:r>
+              <a:rPr sz="1050" b="1">
+                <a:solidFill>
+                  <a:srgbClr val="86EFAC"/>
+                </a:solidFill>
+                <a:latin typeface="Inter"/>
+              </a:rPr>
+              <a:t>• ✓</a:t>
+            </a:r>
+          </a:p>
+        </p:txBody>
+      </p:sp>
+      <p:sp>
+        <p:nvSpPr>
+          <p:cNvPr id="32" name="TextBox 31"/>
+          <p:cNvSpPr txBox="1"/>
+          <p:nvPr/>
+        </p:nvSpPr>
+        <p:spPr>
+          <a:xfrm>
+            <a:off x="4921448" y="5011043"/>
+            <a:ext cx="1352996" cy="200025"/>
+          </a:xfrm>
+          <a:prstGeom prst="rect">
+            <a:avLst/>
+          </a:prstGeom>
+          <a:noFill/>
+        </p:spPr>
+        <p:txBody>
+          <a:bodyPr wrap="square" lIns="0" rIns="0" tIns="0" bIns="0">
+            <a:spAutoFit/>
+          </a:bodyPr>
+          <a:lstStyle/>
+          <a:p>
+            <a:pPr algn="l"/>
+            <a:r>
+              <a:rPr sz="1050" b="0" i="0" u="none">
+                <a:solidFill>
+                  <a:srgbClr val="F5F5F7"/>
+                </a:solidFill>
+                <a:latin typeface="Inter"/>
+              </a:rPr>
+              <a:t>Priority email support</a:t>
+            </a:r>
+          </a:p>
+        </p:txBody>
+      </p:sp>
+      <p:sp>
+        <p:nvSpPr>
+          <p:cNvPr id="33" name="TextBox 32"/>
+          <p:cNvSpPr txBox="1"/>
+          <p:nvPr/>
+        </p:nvSpPr>
+        <p:spPr>
+          <a:xfrm>
+            <a:off x="4708475" y="5515868"/>
+            <a:ext cx="2774900" cy="428625"/>
+          </a:xfrm>
+          <a:prstGeom prst="rect">
+            <a:avLst/>
+          </a:prstGeom>
+          <a:solidFill>
+            <a:srgbClr val="FFFFFF"/>
+          </a:solidFill>
+        </p:spPr>
+        <p:txBody>
+          <a:bodyPr wrap="square" lIns="0" rIns="0" tIns="0" bIns="0">
+            <a:spAutoFit/>
+          </a:bodyPr>
+          <a:lstStyle/>
+          <a:p>
+            <a:pPr algn="ctr"/>
+            <a:r>
+              <a:rPr sz="1050" b="1" i="0" u="none">
+                <a:solidFill>
+                  <a:srgbClr val="0A0A0F"/>
+                </a:solidFill>
+                <a:latin typeface="Inter"/>
+              </a:rPr>
+              <a:t>Try Studio →</a:t>
+            </a:r>
+          </a:p>
+        </p:txBody>
+      </p:sp>
+      <p:sp>
+        <p:nvSpPr>
+          <p:cNvPr id="34" name="Rounded Rectangle 33"/>
+          <p:cNvSpPr/>
+          <p:nvPr/>
+        </p:nvSpPr>
+        <p:spPr>
+          <a:xfrm>
+            <a:off x="7950101" y="1658243"/>
+            <a:ext cx="3327499" cy="4600575"/>
+          </a:xfrm>
+          <a:prstGeom prst="roundRect">
+            <a:avLst/>
+          </a:prstGeom>
+          <a:solidFill>
+            <a:srgbClr val="FFFFFF"/>
+          </a:solidFill>
+          <a:ln w="9525">
+            <a:solidFill>
+              <a:srgbClr val="FFFFFF"/>
+            </a:solidFill>
+          </a:ln>
+        </p:spPr>
+        <p:style>
+          <a:lnRef idx="1">
+            <a:schemeClr val="accent1"/>
+          </a:lnRef>
+          <a:fillRef idx="3">
+            <a:schemeClr val="accent1"/>
+          </a:fillRef>
+          <a:effectRef idx="2">
+            <a:schemeClr val="accent1"/>
+          </a:effectRef>
+          <a:fontRef idx="minor">
+            <a:schemeClr val="lt1"/>
+          </a:fontRef>
+        </p:style>
+        <p:txBody>
+          <a:bodyPr rtlCol="0" anchor="ctr"/>
+          <a:lstStyle/>
+          <a:p>
+            <a:pPr algn="ctr"/>
+          </a:p>
+        </p:txBody>
+      </p:sp>
+      <p:sp>
+        <p:nvSpPr>
+          <p:cNvPr id="35" name="TextBox 34"/>
+          <p:cNvSpPr txBox="1"/>
+          <p:nvPr/>
+        </p:nvSpPr>
+        <p:spPr>
+          <a:xfrm>
+            <a:off x="8226326" y="1972568"/>
+            <a:ext cx="2775049" cy="161925"/>
+          </a:xfrm>
+          <a:prstGeom prst="rect">
+            <a:avLst/>
+          </a:prstGeom>
+          <a:noFill/>
+        </p:spPr>
+        <p:txBody>
+          <a:bodyPr wrap="square" lIns="0" rIns="0" tIns="0" bIns="0">
+            <a:spAutoFit/>
+          </a:bodyPr>
+          <a:lstStyle/>
+          <a:p>
+            <a:pPr algn="l"/>
+            <a:r>
+              <a:rPr sz="1050" b="1" i="0" u="none">
+                <a:solidFill>
+                  <a:srgbClr val="A78BFA"/>
+                </a:solidFill>
+                <a:latin typeface="Inter"/>
+              </a:rPr>
+              <a:t>Enterprise</a:t>
+            </a:r>
+          </a:p>
+        </p:txBody>
+      </p:sp>
+      <p:sp>
+        <p:nvSpPr>
+          <p:cNvPr id="36" name="TextBox 35"/>
+          <p:cNvSpPr txBox="1"/>
+          <p:nvPr/>
+        </p:nvSpPr>
+        <p:spPr>
+          <a:xfrm>
+            <a:off x="8226326" y="2267843"/>
+            <a:ext cx="2775049" cy="533400"/>
+          </a:xfrm>
+          <a:prstGeom prst="rect">
+            <a:avLst/>
+          </a:prstGeom>
+          <a:noFill/>
+        </p:spPr>
+        <p:txBody>
+          <a:bodyPr wrap="square" lIns="0" rIns="0" tIns="0" bIns="0">
+            <a:spAutoFit/>
+          </a:bodyPr>
+          <a:lstStyle/>
+          <a:p>
+            <a:pPr algn="l"/>
+            <a:r>
+              <a:rPr sz="4200" b="1" i="0" u="none">
+                <a:solidFill>
+                  <a:srgbClr val="F5F5F7"/>
+                </a:solidFill>
+                <a:latin typeface="Inter"/>
+              </a:rPr>
+              <a:t>Custom</a:t>
+            </a:r>
+          </a:p>
+        </p:txBody>
+      </p:sp>
+      <p:sp>
+        <p:nvSpPr>
+          <p:cNvPr id="37" name="TextBox 36"/>
+          <p:cNvSpPr txBox="1"/>
+          <p:nvPr/>
+        </p:nvSpPr>
+        <p:spPr>
+          <a:xfrm>
+            <a:off x="8226326" y="2934593"/>
+            <a:ext cx="2775049" cy="400050"/>
+          </a:xfrm>
+          <a:prstGeom prst="rect">
+            <a:avLst/>
+          </a:prstGeom>
+          <a:noFill/>
+        </p:spPr>
+        <p:txBody>
+          <a:bodyPr wrap="square" lIns="0" rIns="0" tIns="0" bIns="0">
+            <a:spAutoFit/>
+          </a:bodyPr>
+          <a:lstStyle/>
+          <a:p>
+            <a:pPr algn="l"/>
+            <a:r>
+              <a:rPr sz="1050" b="0" i="0" u="none">
+                <a:solidFill>
+                  <a:srgbClr val="A1A1AA"/>
+                </a:solidFill>
+                <a:latin typeface="Inter"/>
+              </a:rPr>
+              <a:t>Self-hosted, custom backends, SOC 2, dedicated success engineer.</a:t>
+            </a:r>
+          </a:p>
+        </p:txBody>
+      </p:sp>
+      <p:sp>
+        <p:nvSpPr>
+          <p:cNvPr id="38" name="TextBox 37"/>
+          <p:cNvSpPr txBox="1"/>
+          <p:nvPr/>
+        </p:nvSpPr>
+        <p:spPr>
+          <a:xfrm>
+            <a:off x="8226326" y="3563243"/>
+            <a:ext cx="117723" cy="200025"/>
+          </a:xfrm>
+          <a:prstGeom prst="rect">
+            <a:avLst/>
+          </a:prstGeom>
+          <a:noFill/>
+        </p:spPr>
+        <p:txBody>
+          <a:bodyPr wrap="square" lIns="0" rIns="0" tIns="0" bIns="0">
+            <a:spAutoFit/>
+          </a:bodyPr>
+          <a:lstStyle/>
+          <a:p>
+            <a:r>
+              <a:rPr sz="1050" b="1">
+                <a:solidFill>
+                  <a:srgbClr val="86EFAC"/>
+                </a:solidFill>
+                <a:latin typeface="Inter"/>
+              </a:rPr>
+              <a:t>• ✓</a:t>
+            </a:r>
+          </a:p>
+        </p:txBody>
+      </p:sp>
+      <p:sp>
+        <p:nvSpPr>
+          <p:cNvPr id="39" name="TextBox 38"/>
+          <p:cNvSpPr txBox="1"/>
+          <p:nvPr/>
+        </p:nvSpPr>
+        <p:spPr>
+          <a:xfrm>
+            <a:off x="8439299" y="3563243"/>
+            <a:ext cx="995809" cy="200025"/>
+          </a:xfrm>
+          <a:prstGeom prst="rect">
+            <a:avLst/>
+          </a:prstGeom>
+          <a:noFill/>
+        </p:spPr>
+        <p:txBody>
+          <a:bodyPr wrap="square" lIns="0" rIns="0" tIns="0" bIns="0">
+            <a:spAutoFit/>
+          </a:bodyPr>
+          <a:lstStyle/>
+          <a:p>
+            <a:pPr algn="l"/>
+            <a:r>
+              <a:rPr sz="1050" b="0" i="0" u="none">
+                <a:solidFill>
+                  <a:srgbClr val="F5F5F7"/>
+                </a:solidFill>
+                <a:latin typeface="Inter"/>
+              </a:rPr>
+              <a:t>Unlimited slides</a:t>
+            </a:r>
+          </a:p>
+        </p:txBody>
+      </p:sp>
+      <p:sp>
+        <p:nvSpPr>
+          <p:cNvPr id="40" name="TextBox 39"/>
+          <p:cNvSpPr txBox="1"/>
+          <p:nvPr/>
+        </p:nvSpPr>
+        <p:spPr>
+          <a:xfrm>
+            <a:off x="8226326" y="3925193"/>
+            <a:ext cx="117723" cy="200025"/>
+          </a:xfrm>
+          <a:prstGeom prst="rect">
+            <a:avLst/>
+          </a:prstGeom>
+          <a:noFill/>
+        </p:spPr>
+        <p:txBody>
+          <a:bodyPr wrap="square" lIns="0" rIns="0" tIns="0" bIns="0">
+            <a:spAutoFit/>
+          </a:bodyPr>
+          <a:lstStyle/>
+          <a:p>
+            <a:r>
+              <a:rPr sz="1050" b="1">
+                <a:solidFill>
+                  <a:srgbClr val="86EFAC"/>
+                </a:solidFill>
+                <a:latin typeface="Inter"/>
+              </a:rPr>
+              <a:t>• ✓</a:t>
+            </a:r>
+          </a:p>
+        </p:txBody>
+      </p:sp>
+      <p:sp>
+        <p:nvSpPr>
+          <p:cNvPr id="41" name="TextBox 40"/>
+          <p:cNvSpPr txBox="1"/>
+          <p:nvPr/>
+        </p:nvSpPr>
+        <p:spPr>
+          <a:xfrm>
+            <a:off x="8439299" y="3925193"/>
+            <a:ext cx="1185565" cy="200025"/>
+          </a:xfrm>
+          <a:prstGeom prst="rect">
+            <a:avLst/>
+          </a:prstGeom>
+          <a:noFill/>
+        </p:spPr>
+        <p:txBody>
+          <a:bodyPr wrap="square" lIns="0" rIns="0" tIns="0" bIns="0">
+            <a:spAutoFit/>
+          </a:bodyPr>
+          <a:lstStyle/>
+          <a:p>
+            <a:pPr algn="l"/>
+            <a:r>
+              <a:rPr sz="1050" b="0" i="0" u="none">
+                <a:solidFill>
+                  <a:srgbClr val="F5F5F7"/>
+                </a:solidFill>
+                <a:latin typeface="Inter"/>
+              </a:rPr>
+              <a:t>Self-hosted runner</a:t>
+            </a:r>
+          </a:p>
+        </p:txBody>
+      </p:sp>
+      <p:sp>
+        <p:nvSpPr>
+          <p:cNvPr id="42" name="TextBox 41"/>
+          <p:cNvSpPr txBox="1"/>
+          <p:nvPr/>
+        </p:nvSpPr>
+        <p:spPr>
+          <a:xfrm>
+            <a:off x="8226326" y="4287143"/>
+            <a:ext cx="117723" cy="200025"/>
+          </a:xfrm>
+          <a:prstGeom prst="rect">
+            <a:avLst/>
+          </a:prstGeom>
+          <a:noFill/>
+        </p:spPr>
+        <p:txBody>
+          <a:bodyPr wrap="square" lIns="0" rIns="0" tIns="0" bIns="0">
+            <a:spAutoFit/>
+          </a:bodyPr>
+          <a:lstStyle/>
+          <a:p>
+            <a:r>
+              <a:rPr sz="1050" b="1">
+                <a:solidFill>
+                  <a:srgbClr val="86EFAC"/>
+                </a:solidFill>
+                <a:latin typeface="Inter"/>
+              </a:rPr>
+              <a:t>• ✓</a:t>
+            </a:r>
+          </a:p>
+        </p:txBody>
+      </p:sp>
+      <p:sp>
+        <p:nvSpPr>
+          <p:cNvPr id="43" name="TextBox 42"/>
+          <p:cNvSpPr txBox="1"/>
+          <p:nvPr/>
+        </p:nvSpPr>
+        <p:spPr>
+          <a:xfrm>
+            <a:off x="8439299" y="4287143"/>
+            <a:ext cx="1145381" cy="200025"/>
+          </a:xfrm>
+          <a:prstGeom prst="rect">
+            <a:avLst/>
+          </a:prstGeom>
+          <a:noFill/>
+        </p:spPr>
+        <p:txBody>
+          <a:bodyPr wrap="square" lIns="0" rIns="0" tIns="0" bIns="0">
+            <a:spAutoFit/>
+          </a:bodyPr>
+          <a:lstStyle/>
+          <a:p>
+            <a:pPr algn="l"/>
+            <a:r>
+              <a:rPr sz="1050" b="0" i="0" u="none">
+                <a:solidFill>
+                  <a:srgbClr val="F5F5F7"/>
+                </a:solidFill>
+                <a:latin typeface="Inter"/>
+              </a:rPr>
+              <a:t>BYO LLM provider</a:t>
+            </a:r>
+          </a:p>
+        </p:txBody>
+      </p:sp>
+      <p:sp>
+        <p:nvSpPr>
+          <p:cNvPr id="44" name="TextBox 43"/>
+          <p:cNvSpPr txBox="1"/>
+          <p:nvPr/>
+        </p:nvSpPr>
+        <p:spPr>
+          <a:xfrm>
+            <a:off x="8226326" y="4649093"/>
+            <a:ext cx="117723" cy="200025"/>
+          </a:xfrm>
+          <a:prstGeom prst="rect">
+            <a:avLst/>
+          </a:prstGeom>
+          <a:noFill/>
+        </p:spPr>
+        <p:txBody>
+          <a:bodyPr wrap="square" lIns="0" rIns="0" tIns="0" bIns="0">
+            <a:spAutoFit/>
+          </a:bodyPr>
+          <a:lstStyle/>
+          <a:p>
+            <a:r>
+              <a:rPr sz="1050" b="1">
+                <a:solidFill>
+                  <a:srgbClr val="86EFAC"/>
+                </a:solidFill>
+                <a:latin typeface="Inter"/>
+              </a:rPr>
+              <a:t>• ✓</a:t>
+            </a:r>
+          </a:p>
+        </p:txBody>
+      </p:sp>
+      <p:sp>
+        <p:nvSpPr>
+          <p:cNvPr id="45" name="TextBox 44"/>
+          <p:cNvSpPr txBox="1"/>
+          <p:nvPr/>
+        </p:nvSpPr>
+        <p:spPr>
+          <a:xfrm>
+            <a:off x="8439299" y="4649093"/>
+            <a:ext cx="1569541" cy="200025"/>
+          </a:xfrm>
+          <a:prstGeom prst="rect">
+            <a:avLst/>
+          </a:prstGeom>
+          <a:noFill/>
+        </p:spPr>
+        <p:txBody>
+          <a:bodyPr wrap="square" lIns="0" rIns="0" tIns="0" bIns="0">
+            <a:spAutoFit/>
+          </a:bodyPr>
+          <a:lstStyle/>
+          <a:p>
+            <a:pPr algn="l"/>
+            <a:r>
+              <a:rPr sz="1050" b="0" i="0" u="none">
+                <a:solidFill>
+                  <a:srgbClr val="F5F5F7"/>
+                </a:solidFill>
+                <a:latin typeface="Inter"/>
+              </a:rPr>
+              <a:t>SLA + dedicated support</a:t>
+            </a:r>
+          </a:p>
+        </p:txBody>
+      </p:sp>
+      <p:sp>
+        <p:nvSpPr>
+          <p:cNvPr id="46" name="TextBox 45"/>
+          <p:cNvSpPr txBox="1"/>
+          <p:nvPr/>
+        </p:nvSpPr>
+        <p:spPr>
+          <a:xfrm>
+            <a:off x="8226326" y="5496818"/>
+            <a:ext cx="2775049" cy="447675"/>
+          </a:xfrm>
+          <a:prstGeom prst="rect">
+            <a:avLst/>
+          </a:prstGeom>
+          <a:solidFill>
+            <a:srgbClr val="FFFFFF"/>
+          </a:solidFill>
+        </p:spPr>
+        <p:txBody>
+          <a:bodyPr wrap="square" lIns="0" rIns="0" tIns="0" bIns="0">
+            <a:spAutoFit/>
+          </a:bodyPr>
+          <a:lstStyle/>
+          <a:p>
+            <a:pPr algn="ctr"/>
+            <a:r>
+              <a:rPr sz="1050" b="1" i="0" u="none">
+                <a:solidFill>
+                  <a:srgbClr val="F5F5F7"/>
+                </a:solidFill>
+                <a:latin typeface="Inter"/>
+              </a:rPr>
+              <a:t>Talk to sales</a:t>
+            </a:r>
+          </a:p>
+        </p:txBody>
+      </p:sp>
     </p:spTree>
   </p:cSld>
   <p:clrMapOvr>
